--- a/presentations/01-fizioterapiya.pptx
+++ b/presentations/01-fizioterapiya.pptx
@@ -55,9 +55,12 @@
 <p:sldMaster xmlns:p="http://schemas.openxmlformats.org/presentationml/2006/main" xmlns:a="http://schemas.openxmlformats.org/drawingml/2006/main" xmlns:r="http://schemas.openxmlformats.org/officeDocument/2006/relationships">
   <p:cSld>
     <p:bg>
-      <p:bgRef idx="1001">
-        <a:schemeClr val="bg1"/>
-      </p:bgRef>
+      <p:bgPr>
+        <a:solidFill>
+          <a:srgbClr val="FFFFFF"/>
+        </a:solidFill>
+        <a:effectLst/>
+      </p:bgPr>
     </p:bg>
     <p:spTree>
       <p:nvGrpSpPr>
@@ -106,7 +109,7 @@
     </p:bg>
     <p:spTree>
       <p:nvGrpSpPr>
-        <p:cNvPr id="1" name=""/>
+        <p:cNvPr id="1" name="slide"/>
         <p:cNvGrpSpPr/>
         <p:nvPr/>
       </p:nvGrpSpPr>
@@ -120,7 +123,7 @@
       </p:grpSpPr>
       <p:sp>
         <p:nvSpPr>
-          <p:cNvPr id="101" name="r101"/>
+          <p:cNvPr id="2" name="r2"/>
           <p:cNvSpPr>
             <a:spLocks noGrp="1"/>
           </p:cNvSpPr>
@@ -149,7 +152,7 @@
       </p:sp>
       <p:sp>
         <p:nvSpPr>
-          <p:cNvPr id="102" name="r102"/>
+          <p:cNvPr id="3" name="r3"/>
           <p:cNvSpPr>
             <a:spLocks noGrp="1"/>
           </p:cNvSpPr>
@@ -178,14 +181,14 @@
       </p:sp>
       <p:sp>
         <p:nvSpPr>
-          <p:cNvPr id="103" name="t103"/>
+          <p:cNvPr id="4" name="t4"/>
           <p:cNvSpPr txBox="1"/>
           <p:nvPr/>
         </p:nvSpPr>
         <p:spPr>
           <a:xfrm>
             <a:off x="216000" y="180000"/>
-            <a:ext cx="7200000" cy="360000"/>
+            <a:ext cx="7920000" cy="360000"/>
           </a:xfrm>
           <a:prstGeom prst="rect">
             <a:avLst/>
@@ -205,7 +208,7 @@
                 <a:solidFill>
                   <a:srgbClr val="1DE0C4"/>
                 </a:solidFill>
-                <a:latin typeface="+mj-lt"/>
+                <a:latin typeface="Calibri"/>
               </a:rPr>
               <a:t>FIZIOTERAPIYA  ·  REPRODUKTIV SALOMATLIK</a:t>
             </a:r>
@@ -214,7 +217,7 @@
       </p:sp>
       <p:sp>
         <p:nvSpPr>
-          <p:cNvPr id="104" name="t104"/>
+          <p:cNvPr id="5" name="t5"/>
           <p:cNvSpPr txBox="1"/>
           <p:nvPr/>
         </p:nvSpPr>
@@ -237,11 +240,11 @@
           <a:p>
             <a:pPr algn="l" indent="0" marL="0"/>
             <a:r>
-              <a:rPr lang="uz-UZ" sz="2800" b="1" dirty="0" smtClean="0">
+              <a:rPr lang="uz-UZ" sz="2700" b="1" dirty="0" smtClean="0">
                 <a:solidFill>
                   <a:srgbClr val="FFFFFF"/>
                 </a:solidFill>
-                <a:latin typeface="+mj-lt"/>
+                <a:latin typeface="Calibri"/>
               </a:rPr>
               <a:t>Akusherlik-ginekologiya hamda</a:t>
             </a:r>
@@ -249,11 +252,11 @@
           <a:p>
             <a:pPr algn="l" indent="0" marL="0"/>
             <a:r>
-              <a:rPr lang="uz-UZ" sz="2800" b="1" dirty="0" smtClean="0">
+              <a:rPr lang="uz-UZ" sz="2700" b="1" dirty="0" smtClean="0">
                 <a:solidFill>
                   <a:srgbClr val="FFFFFF"/>
                 </a:solidFill>
-                <a:latin typeface="+mj-lt"/>
+                <a:latin typeface="Calibri"/>
               </a:rPr>
               <a:t>urologik-andrologik amaliyotda</a:t>
             </a:r>
@@ -261,11 +264,11 @@
           <a:p>
             <a:pPr algn="l" indent="0" marL="0"/>
             <a:r>
-              <a:rPr lang="uz-UZ" sz="2800" b="1" dirty="0" smtClean="0">
+              <a:rPr lang="uz-UZ" sz="2700" b="1" dirty="0" smtClean="0">
                 <a:solidFill>
                   <a:srgbClr val="1DE0C4"/>
                 </a:solidFill>
-                <a:latin typeface="+mj-lt"/>
+                <a:latin typeface="Calibri"/>
               </a:rPr>
               <a:t>fizioterapiya</a:t>
             </a:r>
@@ -274,7 +277,7 @@
       </p:sp>
       <p:sp>
         <p:nvSpPr>
-          <p:cNvPr id="105" name="t105"/>
+          <p:cNvPr id="6" name="t6"/>
           <p:cNvSpPr txBox="1"/>
           <p:nvPr/>
         </p:nvSpPr>
@@ -301,7 +304,7 @@
                 <a:solidFill>
                   <a:srgbClr val="BDEEE7"/>
                 </a:solidFill>
-                <a:latin typeface="+mj-lt"/>
+                <a:latin typeface="Calibri"/>
               </a:rPr>
               <a:t>Jismoniy omillarning davolash-tiklash kuchidan reproduktiv</a:t>
             </a:r>
@@ -313,7 +316,7 @@
                 <a:solidFill>
                   <a:srgbClr val="BDEEE7"/>
                 </a:solidFill>
-                <a:latin typeface="+mj-lt"/>
+                <a:latin typeface="Calibri"/>
               </a:rPr>
               <a:t>salomatlikni mustahkamlashda foydalanish — zamonaviy yondashuv.</a:t>
             </a:r>
@@ -322,7 +325,7 @@
       </p:sp>
       <p:sp>
         <p:nvSpPr>
-          <p:cNvPr id="106" name="t106"/>
+          <p:cNvPr id="7" name="t7"/>
           <p:cNvSpPr txBox="1"/>
           <p:nvPr/>
         </p:nvSpPr>
@@ -349,7 +352,7 @@
                 <a:solidFill>
                   <a:srgbClr val="13B3A6"/>
                 </a:solidFill>
-                <a:latin typeface="+mj-lt"/>
+                <a:latin typeface="Calibri"/>
               </a:rPr>
               <a:t>PhysioMed  ·  2026  ·  14 slayd</a:t>
             </a:r>
@@ -377,7 +380,7 @@
     </p:bg>
     <p:spTree>
       <p:nvGrpSpPr>
-        <p:cNvPr id="1" name=""/>
+        <p:cNvPr id="1" name="slide"/>
         <p:cNvGrpSpPr/>
         <p:nvPr/>
       </p:nvGrpSpPr>
@@ -391,7 +394,7 @@
       </p:grpSpPr>
       <p:sp>
         <p:nvSpPr>
-          <p:cNvPr id="267" name="r267"/>
+          <p:cNvPr id="2" name="r2"/>
           <p:cNvSpPr>
             <a:spLocks noGrp="1"/>
           </p:cNvSpPr>
@@ -420,7 +423,7 @@
       </p:sp>
       <p:sp>
         <p:nvSpPr>
-          <p:cNvPr id="268" name="t268"/>
+          <p:cNvPr id="3" name="t3"/>
           <p:cNvSpPr txBox="1"/>
           <p:nvPr/>
         </p:nvSpPr>
@@ -447,7 +450,7 @@
                 <a:solidFill>
                   <a:srgbClr val="FFFFFF"/>
                 </a:solidFill>
-                <a:latin typeface="+mj-lt"/>
+                <a:latin typeface="Calibri"/>
               </a:rPr>
               <a:t>08 · ANDROLOGIK AMALIYOTDA FIZIOTERAPIYA</a:t>
             </a:r>
@@ -456,7 +459,7 @@
       </p:sp>
       <p:sp>
         <p:nvSpPr>
-          <p:cNvPr id="269" name="r269"/>
+          <p:cNvPr id="4" name="r4"/>
           <p:cNvSpPr>
             <a:spLocks noGrp="1"/>
           </p:cNvSpPr>
@@ -485,14 +488,14 @@
       </p:sp>
       <p:sp>
         <p:nvSpPr>
-          <p:cNvPr id="270" name="t270"/>
+          <p:cNvPr id="5" name="t5"/>
           <p:cNvSpPr txBox="1"/>
           <p:nvPr/>
         </p:nvSpPr>
         <p:spPr>
           <a:xfrm>
             <a:off x="341999" y="720000"/>
-            <a:ext cx="5634001" cy="270000"/>
+            <a:ext cx="5634001" cy="280800"/>
           </a:xfrm>
           <a:prstGeom prst="rect">
             <a:avLst/>
@@ -512,7 +515,7 @@
                 <a:solidFill>
                   <a:srgbClr val="06262A"/>
                 </a:solidFill>
-                <a:latin typeface="+mj-lt"/>
+                <a:latin typeface="Calibri"/>
               </a:rPr>
               <a:t>Erektil disfunksiya: magnit-lazer va zarba to'lqinli terapiya (LI-ESWT)</a:t>
             </a:r>
@@ -521,15 +524,15 @@
       </p:sp>
       <p:sp>
         <p:nvSpPr>
-          <p:cNvPr id="271" name="r271"/>
-          <p:cNvSpPr>
-            <a:spLocks noGrp="1"/>
-          </p:cNvSpPr>
-          <p:nvPr/>
-        </p:nvSpPr>
-        <p:spPr>
-          <a:xfrm>
-            <a:off x="216000" y="1094400"/>
+          <p:cNvPr id="6" name="r6"/>
+          <p:cNvSpPr>
+            <a:spLocks noGrp="1"/>
+          </p:cNvSpPr>
+          <p:nvPr/>
+        </p:nvSpPr>
+        <p:spPr>
+          <a:xfrm>
+            <a:off x="216000" y="1101600"/>
             <a:ext cx="57600" cy="57600"/>
           </a:xfrm>
           <a:prstGeom prst="rect">
@@ -550,14 +553,14 @@
       </p:sp>
       <p:sp>
         <p:nvSpPr>
-          <p:cNvPr id="272" name="t272"/>
-          <p:cNvSpPr txBox="1"/>
-          <p:nvPr/>
-        </p:nvSpPr>
-        <p:spPr>
-          <a:xfrm>
-            <a:off x="341999" y="1015200"/>
-            <a:ext cx="5634001" cy="270000"/>
+          <p:cNvPr id="7" name="t7"/>
+          <p:cNvSpPr txBox="1"/>
+          <p:nvPr/>
+        </p:nvSpPr>
+        <p:spPr>
+          <a:xfrm>
+            <a:off x="341999" y="1022400"/>
+            <a:ext cx="5634001" cy="280800"/>
           </a:xfrm>
           <a:prstGeom prst="rect">
             <a:avLst/>
@@ -577,7 +580,7 @@
                 <a:solidFill>
                   <a:srgbClr val="06262A"/>
                 </a:solidFill>
-                <a:latin typeface="+mj-lt"/>
+                <a:latin typeface="Calibri"/>
               </a:rPr>
               <a:t>Erkak bepushtligi: spermatogenezni yaxshilash, dimlanishni kamaytirish</a:t>
             </a:r>
@@ -586,15 +589,15 @@
       </p:sp>
       <p:sp>
         <p:nvSpPr>
-          <p:cNvPr id="273" name="r273"/>
-          <p:cNvSpPr>
-            <a:spLocks noGrp="1"/>
-          </p:cNvSpPr>
-          <p:nvPr/>
-        </p:nvSpPr>
-        <p:spPr>
-          <a:xfrm>
-            <a:off x="216000" y="1389600"/>
+          <p:cNvPr id="8" name="r8"/>
+          <p:cNvSpPr>
+            <a:spLocks noGrp="1"/>
+          </p:cNvSpPr>
+          <p:nvPr/>
+        </p:nvSpPr>
+        <p:spPr>
+          <a:xfrm>
+            <a:off x="216000" y="1404000"/>
             <a:ext cx="57600" cy="57600"/>
           </a:xfrm>
           <a:prstGeom prst="rect">
@@ -615,14 +618,14 @@
       </p:sp>
       <p:sp>
         <p:nvSpPr>
-          <p:cNvPr id="274" name="t274"/>
-          <p:cNvSpPr txBox="1"/>
-          <p:nvPr/>
-        </p:nvSpPr>
-        <p:spPr>
-          <a:xfrm>
-            <a:off x="341999" y="1310400"/>
-            <a:ext cx="5634001" cy="270000"/>
+          <p:cNvPr id="9" name="t9"/>
+          <p:cNvSpPr txBox="1"/>
+          <p:nvPr/>
+        </p:nvSpPr>
+        <p:spPr>
+          <a:xfrm>
+            <a:off x="341999" y="1324800"/>
+            <a:ext cx="5634001" cy="280800"/>
           </a:xfrm>
           <a:prstGeom prst="rect">
             <a:avLst/>
@@ -642,7 +645,7 @@
                 <a:solidFill>
                   <a:srgbClr val="06262A"/>
                 </a:solidFill>
-                <a:latin typeface="+mj-lt"/>
+                <a:latin typeface="Calibri"/>
               </a:rPr>
               <a:t>Surunkali tos og'rig'i: elektro- va magnitoterapiya bilan kompleks davolash</a:t>
             </a:r>
@@ -651,15 +654,15 @@
       </p:sp>
       <p:sp>
         <p:nvSpPr>
-          <p:cNvPr id="275" name="r275"/>
-          <p:cNvSpPr>
-            <a:spLocks noGrp="1"/>
-          </p:cNvSpPr>
-          <p:nvPr/>
-        </p:nvSpPr>
-        <p:spPr>
-          <a:xfrm>
-            <a:off x="216000" y="1684800"/>
+          <p:cNvPr id="10" name="r10"/>
+          <p:cNvSpPr>
+            <a:spLocks noGrp="1"/>
+          </p:cNvSpPr>
+          <p:nvPr/>
+        </p:nvSpPr>
+        <p:spPr>
+          <a:xfrm>
+            <a:off x="216000" y="1706400"/>
             <a:ext cx="57600" cy="57600"/>
           </a:xfrm>
           <a:prstGeom prst="rect">
@@ -680,14 +683,14 @@
       </p:sp>
       <p:sp>
         <p:nvSpPr>
-          <p:cNvPr id="276" name="t276"/>
-          <p:cNvSpPr txBox="1"/>
-          <p:nvPr/>
-        </p:nvSpPr>
-        <p:spPr>
-          <a:xfrm>
-            <a:off x="341999" y="1605600"/>
-            <a:ext cx="5634001" cy="270000"/>
+          <p:cNvPr id="11" name="t11"/>
+          <p:cNvSpPr txBox="1"/>
+          <p:nvPr/>
+        </p:nvSpPr>
+        <p:spPr>
+          <a:xfrm>
+            <a:off x="341999" y="1627200"/>
+            <a:ext cx="5634001" cy="280800"/>
           </a:xfrm>
           <a:prstGeom prst="rect">
             <a:avLst/>
@@ -707,7 +710,7 @@
                 <a:solidFill>
                   <a:srgbClr val="06262A"/>
                 </a:solidFill>
-                <a:latin typeface="+mj-lt"/>
+                <a:latin typeface="Calibri"/>
               </a:rPr>
               <a:t>Peyroni kasalligi: fonoforez va lazer bilan chandiqlarni yumshatish</a:t>
             </a:r>
@@ -716,7 +719,7 @@
       </p:sp>
       <p:sp>
         <p:nvSpPr>
-          <p:cNvPr id="277" name="r277"/>
+          <p:cNvPr id="12" name="r12"/>
           <p:cNvSpPr>
             <a:spLocks noGrp="1"/>
           </p:cNvSpPr>
@@ -745,7 +748,7 @@
       </p:sp>
       <p:sp>
         <p:nvSpPr>
-          <p:cNvPr id="278" name="t278"/>
+          <p:cNvPr id="13" name="t13"/>
           <p:cNvSpPr txBox="1"/>
           <p:nvPr/>
         </p:nvSpPr>
@@ -772,7 +775,7 @@
                 <a:solidFill>
                   <a:srgbClr val="FFFFFF"/>
                 </a:solidFill>
-                <a:latin typeface="+mj-lt"/>
+                <a:latin typeface="Calibri"/>
               </a:rPr>
               <a:t>Zamonaviy yo'nalish</a:t>
             </a:r>
@@ -781,15 +784,15 @@
       </p:sp>
       <p:sp>
         <p:nvSpPr>
-          <p:cNvPr id="279" name="r279"/>
-          <p:cNvSpPr>
-            <a:spLocks noGrp="1"/>
-          </p:cNvSpPr>
-          <p:nvPr/>
-        </p:nvSpPr>
-        <p:spPr>
-          <a:xfrm>
-            <a:off x="6623999" y="1303200"/>
+          <p:cNvPr id="14" name="r14"/>
+          <p:cNvSpPr>
+            <a:spLocks noGrp="1"/>
+          </p:cNvSpPr>
+          <p:nvPr/>
+        </p:nvSpPr>
+        <p:spPr>
+          <a:xfrm>
+            <a:off x="6623999" y="1339200"/>
             <a:ext cx="57600" cy="57600"/>
           </a:xfrm>
           <a:prstGeom prst="rect">
@@ -810,14 +813,14 @@
       </p:sp>
       <p:sp>
         <p:nvSpPr>
-          <p:cNvPr id="280" name="t280"/>
-          <p:cNvSpPr txBox="1"/>
-          <p:nvPr/>
-        </p:nvSpPr>
-        <p:spPr>
-          <a:xfrm>
-            <a:off x="6749998" y="1224000"/>
-            <a:ext cx="4914001" cy="270000"/>
+          <p:cNvPr id="15" name="t15"/>
+          <p:cNvSpPr txBox="1"/>
+          <p:nvPr/>
+        </p:nvSpPr>
+        <p:spPr>
+          <a:xfrm>
+            <a:off x="6749998" y="1260000"/>
+            <a:ext cx="4914001" cy="280800"/>
           </a:xfrm>
           <a:prstGeom prst="rect">
             <a:avLst/>
@@ -837,7 +840,7 @@
                 <a:solidFill>
                   <a:srgbClr val="FFFFFF"/>
                 </a:solidFill>
-                <a:latin typeface="+mj-lt"/>
+                <a:latin typeface="Calibri"/>
               </a:rPr>
               <a:t>Fiziologik tiklanish — dorisiz</a:t>
             </a:r>
@@ -846,15 +849,15 @@
       </p:sp>
       <p:sp>
         <p:nvSpPr>
-          <p:cNvPr id="281" name="r281"/>
-          <p:cNvSpPr>
-            <a:spLocks noGrp="1"/>
-          </p:cNvSpPr>
-          <p:nvPr/>
-        </p:nvSpPr>
-        <p:spPr>
-          <a:xfrm>
-            <a:off x="6623999" y="1598400"/>
+          <p:cNvPr id="16" name="r16"/>
+          <p:cNvSpPr>
+            <a:spLocks noGrp="1"/>
+          </p:cNvSpPr>
+          <p:nvPr/>
+        </p:nvSpPr>
+        <p:spPr>
+          <a:xfrm>
+            <a:off x="6623999" y="1641600"/>
             <a:ext cx="57600" cy="57600"/>
           </a:xfrm>
           <a:prstGeom prst="rect">
@@ -875,14 +878,14 @@
       </p:sp>
       <p:sp>
         <p:nvSpPr>
-          <p:cNvPr id="282" name="t282"/>
-          <p:cNvSpPr txBox="1"/>
-          <p:nvPr/>
-        </p:nvSpPr>
-        <p:spPr>
-          <a:xfrm>
-            <a:off x="6749998" y="1519200"/>
-            <a:ext cx="4914001" cy="270000"/>
+          <p:cNvPr id="17" name="t17"/>
+          <p:cNvSpPr txBox="1"/>
+          <p:nvPr/>
+        </p:nvSpPr>
+        <p:spPr>
+          <a:xfrm>
+            <a:off x="6749998" y="1562400"/>
+            <a:ext cx="4914001" cy="280800"/>
           </a:xfrm>
           <a:prstGeom prst="rect">
             <a:avLst/>
@@ -902,7 +905,7 @@
                 <a:solidFill>
                   <a:srgbClr val="FFFFFF"/>
                 </a:solidFill>
-                <a:latin typeface="+mj-lt"/>
+                <a:latin typeface="Calibri"/>
               </a:rPr>
               <a:t>Qon tomir yangilanishi (angiogenez)</a:t>
             </a:r>
@@ -911,15 +914,15 @@
       </p:sp>
       <p:sp>
         <p:nvSpPr>
-          <p:cNvPr id="283" name="r283"/>
-          <p:cNvSpPr>
-            <a:spLocks noGrp="1"/>
-          </p:cNvSpPr>
-          <p:nvPr/>
-        </p:nvSpPr>
-        <p:spPr>
-          <a:xfrm>
-            <a:off x="6623999" y="1893600"/>
+          <p:cNvPr id="18" name="r18"/>
+          <p:cNvSpPr>
+            <a:spLocks noGrp="1"/>
+          </p:cNvSpPr>
+          <p:nvPr/>
+        </p:nvSpPr>
+        <p:spPr>
+          <a:xfrm>
+            <a:off x="6623999" y="1944000"/>
             <a:ext cx="57600" cy="57600"/>
           </a:xfrm>
           <a:prstGeom prst="rect">
@@ -940,14 +943,14 @@
       </p:sp>
       <p:sp>
         <p:nvSpPr>
-          <p:cNvPr id="284" name="t284"/>
-          <p:cNvSpPr txBox="1"/>
-          <p:nvPr/>
-        </p:nvSpPr>
-        <p:spPr>
-          <a:xfrm>
-            <a:off x="6749998" y="1814400"/>
-            <a:ext cx="4914001" cy="270000"/>
+          <p:cNvPr id="19" name="t19"/>
+          <p:cNvSpPr txBox="1"/>
+          <p:nvPr/>
+        </p:nvSpPr>
+        <p:spPr>
+          <a:xfrm>
+            <a:off x="6749998" y="1864800"/>
+            <a:ext cx="4914001" cy="280800"/>
           </a:xfrm>
           <a:prstGeom prst="rect">
             <a:avLst/>
@@ -967,7 +970,7 @@
                 <a:solidFill>
                   <a:srgbClr val="FFFFFF"/>
                 </a:solidFill>
-                <a:latin typeface="+mj-lt"/>
+                <a:latin typeface="Calibri"/>
               </a:rPr>
               <a:t>Xavfsiz va chidamli usul</a:t>
             </a:r>
@@ -995,7 +998,7 @@
     </p:bg>
     <p:spTree>
       <p:nvGrpSpPr>
-        <p:cNvPr id="1" name=""/>
+        <p:cNvPr id="1" name="slide"/>
         <p:cNvGrpSpPr/>
         <p:nvPr/>
       </p:nvGrpSpPr>
@@ -1009,7 +1012,7 @@
       </p:grpSpPr>
       <p:sp>
         <p:nvSpPr>
-          <p:cNvPr id="285" name="r285"/>
+          <p:cNvPr id="2" name="r2"/>
           <p:cNvSpPr>
             <a:spLocks noGrp="1"/>
           </p:cNvSpPr>
@@ -1038,7 +1041,7 @@
       </p:sp>
       <p:sp>
         <p:nvSpPr>
-          <p:cNvPr id="286" name="t286"/>
+          <p:cNvPr id="3" name="t3"/>
           <p:cNvSpPr txBox="1"/>
           <p:nvPr/>
         </p:nvSpPr>
@@ -1065,7 +1068,7 @@
                 <a:solidFill>
                   <a:srgbClr val="FFFFFF"/>
                 </a:solidFill>
-                <a:latin typeface="+mj-lt"/>
+                <a:latin typeface="Calibri"/>
               </a:rPr>
               <a:t>09 · KO'RSATMA VA QARSHI KO'RSATMALAR</a:t>
             </a:r>
@@ -1074,7 +1077,7 @@
       </p:sp>
       <p:sp>
         <p:nvSpPr>
-          <p:cNvPr id="287" name="r287"/>
+          <p:cNvPr id="4" name="r4"/>
           <p:cNvSpPr>
             <a:spLocks noGrp="1"/>
           </p:cNvSpPr>
@@ -1103,7 +1106,7 @@
       </p:sp>
       <p:sp>
         <p:nvSpPr>
-          <p:cNvPr id="288" name="t288"/>
+          <p:cNvPr id="5" name="t5"/>
           <p:cNvSpPr txBox="1"/>
           <p:nvPr/>
         </p:nvSpPr>
@@ -1130,16 +1133,16 @@
                 <a:solidFill>
                   <a:srgbClr val="0A7D70"/>
                 </a:solidFill>
-                <a:latin typeface="+mj-lt"/>
-              </a:rPr>
-              <a:t>  KO'RSATMALAR</a:t>
-            </a:r>
-          </a:p>
-        </p:txBody>
-      </p:sp>
-      <p:sp>
-        <p:nvSpPr>
-          <p:cNvPr id="289" name="r289"/>
+                <a:latin typeface="Calibri"/>
+              </a:rPr>
+              <a:t>KO'RSATMALAR</a:t>
+            </a:r>
+          </a:p>
+        </p:txBody>
+      </p:sp>
+      <p:sp>
+        <p:nvSpPr>
+          <p:cNvPr id="6" name="r6"/>
           <p:cNvSpPr>
             <a:spLocks noGrp="1"/>
           </p:cNvSpPr>
@@ -1168,14 +1171,14 @@
       </p:sp>
       <p:sp>
         <p:nvSpPr>
-          <p:cNvPr id="290" name="t290"/>
+          <p:cNvPr id="7" name="t7"/>
           <p:cNvSpPr txBox="1"/>
           <p:nvPr/>
         </p:nvSpPr>
         <p:spPr>
           <a:xfrm>
             <a:off x="449999" y="1152000"/>
-            <a:ext cx="5094001" cy="270000"/>
+            <a:ext cx="5094001" cy="280800"/>
           </a:xfrm>
           <a:prstGeom prst="rect">
             <a:avLst/>
@@ -1195,7 +1198,7 @@
                 <a:solidFill>
                   <a:srgbClr val="3A5A5C"/>
                 </a:solidFill>
-                <a:latin typeface="+mj-lt"/>
+                <a:latin typeface="Calibri"/>
               </a:rPr>
               <a:t>Surunkali yallig'lanish jarayonlari</a:t>
             </a:r>
@@ -1204,15 +1207,15 @@
       </p:sp>
       <p:sp>
         <p:nvSpPr>
-          <p:cNvPr id="291" name="r291"/>
-          <p:cNvSpPr>
-            <a:spLocks noGrp="1"/>
-          </p:cNvSpPr>
-          <p:nvPr/>
-        </p:nvSpPr>
-        <p:spPr>
-          <a:xfrm>
-            <a:off x="324000" y="1526400"/>
+          <p:cNvPr id="8" name="r8"/>
+          <p:cNvSpPr>
+            <a:spLocks noGrp="1"/>
+          </p:cNvSpPr>
+          <p:nvPr/>
+        </p:nvSpPr>
+        <p:spPr>
+          <a:xfrm>
+            <a:off x="324000" y="1533600"/>
             <a:ext cx="57600" cy="57600"/>
           </a:xfrm>
           <a:prstGeom prst="rect">
@@ -1233,14 +1236,14 @@
       </p:sp>
       <p:sp>
         <p:nvSpPr>
-          <p:cNvPr id="292" name="t292"/>
-          <p:cNvSpPr txBox="1"/>
-          <p:nvPr/>
-        </p:nvSpPr>
-        <p:spPr>
-          <a:xfrm>
-            <a:off x="449999" y="1447200"/>
-            <a:ext cx="5094001" cy="270000"/>
+          <p:cNvPr id="9" name="t9"/>
+          <p:cNvSpPr txBox="1"/>
+          <p:nvPr/>
+        </p:nvSpPr>
+        <p:spPr>
+          <a:xfrm>
+            <a:off x="449999" y="1454400"/>
+            <a:ext cx="5094001" cy="280800"/>
           </a:xfrm>
           <a:prstGeom prst="rect">
             <a:avLst/>
@@ -1260,7 +1263,7 @@
                 <a:solidFill>
                   <a:srgbClr val="3A5A5C"/>
                 </a:solidFill>
-                <a:latin typeface="+mj-lt"/>
+                <a:latin typeface="Calibri"/>
               </a:rPr>
               <a:t>Bitishma kasalligi va chandiqlar</a:t>
             </a:r>
@@ -1269,15 +1272,15 @@
       </p:sp>
       <p:sp>
         <p:nvSpPr>
-          <p:cNvPr id="293" name="r293"/>
-          <p:cNvSpPr>
-            <a:spLocks noGrp="1"/>
-          </p:cNvSpPr>
-          <p:nvPr/>
-        </p:nvSpPr>
-        <p:spPr>
-          <a:xfrm>
-            <a:off x="324000" y="1821600"/>
+          <p:cNvPr id="10" name="r10"/>
+          <p:cNvSpPr>
+            <a:spLocks noGrp="1"/>
+          </p:cNvSpPr>
+          <p:nvPr/>
+        </p:nvSpPr>
+        <p:spPr>
+          <a:xfrm>
+            <a:off x="324000" y="1836000"/>
             <a:ext cx="57600" cy="57600"/>
           </a:xfrm>
           <a:prstGeom prst="rect">
@@ -1298,14 +1301,14 @@
       </p:sp>
       <p:sp>
         <p:nvSpPr>
-          <p:cNvPr id="294" name="t294"/>
-          <p:cNvSpPr txBox="1"/>
-          <p:nvPr/>
-        </p:nvSpPr>
-        <p:spPr>
-          <a:xfrm>
-            <a:off x="449999" y="1742400"/>
-            <a:ext cx="5094001" cy="270000"/>
+          <p:cNvPr id="11" name="t11"/>
+          <p:cNvSpPr txBox="1"/>
+          <p:nvPr/>
+        </p:nvSpPr>
+        <p:spPr>
+          <a:xfrm>
+            <a:off x="449999" y="1756800"/>
+            <a:ext cx="5094001" cy="280800"/>
           </a:xfrm>
           <a:prstGeom prst="rect">
             <a:avLst/>
@@ -1325,7 +1328,7 @@
                 <a:solidFill>
                   <a:srgbClr val="3A5A5C"/>
                 </a:solidFill>
-                <a:latin typeface="+mj-lt"/>
+                <a:latin typeface="Calibri"/>
               </a:rPr>
               <a:t>Reabilitatsiya (operatsiya / tug'ruqdan keyin)</a:t>
             </a:r>
@@ -1334,15 +1337,15 @@
       </p:sp>
       <p:sp>
         <p:nvSpPr>
-          <p:cNvPr id="295" name="r295"/>
-          <p:cNvSpPr>
-            <a:spLocks noGrp="1"/>
-          </p:cNvSpPr>
-          <p:nvPr/>
-        </p:nvSpPr>
-        <p:spPr>
-          <a:xfrm>
-            <a:off x="324000" y="2116800"/>
+          <p:cNvPr id="12" name="r12"/>
+          <p:cNvSpPr>
+            <a:spLocks noGrp="1"/>
+          </p:cNvSpPr>
+          <p:nvPr/>
+        </p:nvSpPr>
+        <p:spPr>
+          <a:xfrm>
+            <a:off x="324000" y="2138400"/>
             <a:ext cx="57600" cy="57600"/>
           </a:xfrm>
           <a:prstGeom prst="rect">
@@ -1363,14 +1366,14 @@
       </p:sp>
       <p:sp>
         <p:nvSpPr>
-          <p:cNvPr id="296" name="t296"/>
-          <p:cNvSpPr txBox="1"/>
-          <p:nvPr/>
-        </p:nvSpPr>
-        <p:spPr>
-          <a:xfrm>
-            <a:off x="449999" y="2037600"/>
-            <a:ext cx="5094001" cy="270000"/>
+          <p:cNvPr id="13" name="t13"/>
+          <p:cNvSpPr txBox="1"/>
+          <p:nvPr/>
+        </p:nvSpPr>
+        <p:spPr>
+          <a:xfrm>
+            <a:off x="449999" y="2059200"/>
+            <a:ext cx="5094001" cy="280800"/>
           </a:xfrm>
           <a:prstGeom prst="rect">
             <a:avLst/>
@@ -1390,7 +1393,7 @@
                 <a:solidFill>
                   <a:srgbClr val="3A5A5C"/>
                 </a:solidFill>
-                <a:latin typeface="+mj-lt"/>
+                <a:latin typeface="Calibri"/>
               </a:rPr>
               <a:t>Surunkali og'riq sindromlari</a:t>
             </a:r>
@@ -1399,15 +1402,15 @@
       </p:sp>
       <p:sp>
         <p:nvSpPr>
-          <p:cNvPr id="297" name="r297"/>
-          <p:cNvSpPr>
-            <a:spLocks noGrp="1"/>
-          </p:cNvSpPr>
-          <p:nvPr/>
-        </p:nvSpPr>
-        <p:spPr>
-          <a:xfrm>
-            <a:off x="324000" y="2412000"/>
+          <p:cNvPr id="14" name="r14"/>
+          <p:cNvSpPr>
+            <a:spLocks noGrp="1"/>
+          </p:cNvSpPr>
+          <p:nvPr/>
+        </p:nvSpPr>
+        <p:spPr>
+          <a:xfrm>
+            <a:off x="324000" y="2440800"/>
             <a:ext cx="57600" cy="57600"/>
           </a:xfrm>
           <a:prstGeom prst="rect">
@@ -1428,14 +1431,14 @@
       </p:sp>
       <p:sp>
         <p:nvSpPr>
-          <p:cNvPr id="298" name="t298"/>
-          <p:cNvSpPr txBox="1"/>
-          <p:nvPr/>
-        </p:nvSpPr>
-        <p:spPr>
-          <a:xfrm>
-            <a:off x="449999" y="2332800"/>
-            <a:ext cx="5094001" cy="270000"/>
+          <p:cNvPr id="15" name="t15"/>
+          <p:cNvSpPr txBox="1"/>
+          <p:nvPr/>
+        </p:nvSpPr>
+        <p:spPr>
+          <a:xfrm>
+            <a:off x="449999" y="2361600"/>
+            <a:ext cx="5094001" cy="280800"/>
           </a:xfrm>
           <a:prstGeom prst="rect">
             <a:avLst/>
@@ -1455,7 +1458,7 @@
                 <a:solidFill>
                   <a:srgbClr val="3A5A5C"/>
                 </a:solidFill>
-                <a:latin typeface="+mj-lt"/>
+                <a:latin typeface="Calibri"/>
               </a:rPr>
               <a:t>Funksional bepushtlik shakllari</a:t>
             </a:r>
@@ -1464,15 +1467,15 @@
       </p:sp>
       <p:sp>
         <p:nvSpPr>
-          <p:cNvPr id="299" name="r299"/>
-          <p:cNvSpPr>
-            <a:spLocks noGrp="1"/>
-          </p:cNvSpPr>
-          <p:nvPr/>
-        </p:nvSpPr>
-        <p:spPr>
-          <a:xfrm>
-            <a:off x="324000" y="2707200"/>
+          <p:cNvPr id="16" name="r16"/>
+          <p:cNvSpPr>
+            <a:spLocks noGrp="1"/>
+          </p:cNvSpPr>
+          <p:nvPr/>
+        </p:nvSpPr>
+        <p:spPr>
+          <a:xfrm>
+            <a:off x="324000" y="2743200"/>
             <a:ext cx="57600" cy="57600"/>
           </a:xfrm>
           <a:prstGeom prst="rect">
@@ -1493,14 +1496,14 @@
       </p:sp>
       <p:sp>
         <p:nvSpPr>
-          <p:cNvPr id="300" name="t300"/>
-          <p:cNvSpPr txBox="1"/>
-          <p:nvPr/>
-        </p:nvSpPr>
-        <p:spPr>
-          <a:xfrm>
-            <a:off x="449999" y="2628000"/>
-            <a:ext cx="5094001" cy="270000"/>
+          <p:cNvPr id="17" name="t17"/>
+          <p:cNvSpPr txBox="1"/>
+          <p:nvPr/>
+        </p:nvSpPr>
+        <p:spPr>
+          <a:xfrm>
+            <a:off x="449999" y="2664000"/>
+            <a:ext cx="5094001" cy="280800"/>
           </a:xfrm>
           <a:prstGeom prst="rect">
             <a:avLst/>
@@ -1520,7 +1523,7 @@
                 <a:solidFill>
                   <a:srgbClr val="3A5A5C"/>
                 </a:solidFill>
-                <a:latin typeface="+mj-lt"/>
+                <a:latin typeface="Calibri"/>
               </a:rPr>
               <a:t>Tos tubi disfunksiyasi</a:t>
             </a:r>
@@ -1529,7 +1532,7 @@
       </p:sp>
       <p:sp>
         <p:nvSpPr>
-          <p:cNvPr id="301" name="r301"/>
+          <p:cNvPr id="18" name="r18"/>
           <p:cNvSpPr>
             <a:spLocks noGrp="1"/>
           </p:cNvSpPr>
@@ -1558,7 +1561,7 @@
       </p:sp>
       <p:sp>
         <p:nvSpPr>
-          <p:cNvPr id="302" name="t302"/>
+          <p:cNvPr id="19" name="t19"/>
           <p:cNvSpPr txBox="1"/>
           <p:nvPr/>
         </p:nvSpPr>
@@ -1585,16 +1588,16 @@
                 <a:solidFill>
                   <a:srgbClr val="C64363"/>
                 </a:solidFill>
-                <a:latin typeface="+mj-lt"/>
-              </a:rPr>
-              <a:t>  QARSHI KO'RSATMALAR</a:t>
-            </a:r>
-          </a:p>
-        </p:txBody>
-      </p:sp>
-      <p:sp>
-        <p:nvSpPr>
-          <p:cNvPr id="303" name="r303"/>
+                <a:latin typeface="Calibri"/>
+              </a:rPr>
+              <a:t>QARSHI KO'RSATMALAR</a:t>
+            </a:r>
+          </a:p>
+        </p:txBody>
+      </p:sp>
+      <p:sp>
+        <p:nvSpPr>
+          <p:cNvPr id="20" name="r20"/>
           <p:cNvSpPr>
             <a:spLocks noGrp="1"/>
           </p:cNvSpPr>
@@ -1623,14 +1626,14 @@
       </p:sp>
       <p:sp>
         <p:nvSpPr>
-          <p:cNvPr id="304" name="t304"/>
+          <p:cNvPr id="21" name="t21"/>
           <p:cNvSpPr txBox="1"/>
           <p:nvPr/>
         </p:nvSpPr>
         <p:spPr>
           <a:xfrm>
             <a:off x="6497999" y="1152000"/>
-            <a:ext cx="5094001" cy="270000"/>
+            <a:ext cx="5094001" cy="280800"/>
           </a:xfrm>
           <a:prstGeom prst="rect">
             <a:avLst/>
@@ -1650,7 +1653,7 @@
                 <a:solidFill>
                   <a:srgbClr val="5A3A40"/>
                 </a:solidFill>
-                <a:latin typeface="+mj-lt"/>
+                <a:latin typeface="Calibri"/>
               </a:rPr>
               <a:t>Xavfli o'smalar (onkologiya)</a:t>
             </a:r>
@@ -1659,15 +1662,15 @@
       </p:sp>
       <p:sp>
         <p:nvSpPr>
-          <p:cNvPr id="305" name="r305"/>
-          <p:cNvSpPr>
-            <a:spLocks noGrp="1"/>
-          </p:cNvSpPr>
-          <p:nvPr/>
-        </p:nvSpPr>
-        <p:spPr>
-          <a:xfrm>
-            <a:off x="6372000" y="1526400"/>
+          <p:cNvPr id="22" name="r22"/>
+          <p:cNvSpPr>
+            <a:spLocks noGrp="1"/>
+          </p:cNvSpPr>
+          <p:nvPr/>
+        </p:nvSpPr>
+        <p:spPr>
+          <a:xfrm>
+            <a:off x="6372000" y="1533600"/>
             <a:ext cx="57600" cy="57600"/>
           </a:xfrm>
           <a:prstGeom prst="rect">
@@ -1688,14 +1691,14 @@
       </p:sp>
       <p:sp>
         <p:nvSpPr>
-          <p:cNvPr id="306" name="t306"/>
-          <p:cNvSpPr txBox="1"/>
-          <p:nvPr/>
-        </p:nvSpPr>
-        <p:spPr>
-          <a:xfrm>
-            <a:off x="6497999" y="1447200"/>
-            <a:ext cx="5094001" cy="270000"/>
+          <p:cNvPr id="23" name="t23"/>
+          <p:cNvSpPr txBox="1"/>
+          <p:nvPr/>
+        </p:nvSpPr>
+        <p:spPr>
+          <a:xfrm>
+            <a:off x="6497999" y="1454400"/>
+            <a:ext cx="5094001" cy="280800"/>
           </a:xfrm>
           <a:prstGeom prst="rect">
             <a:avLst/>
@@ -1715,7 +1718,7 @@
                 <a:solidFill>
                   <a:srgbClr val="5A3A40"/>
                 </a:solidFill>
-                <a:latin typeface="+mj-lt"/>
+                <a:latin typeface="Calibri"/>
               </a:rPr>
               <a:t>O'tkir yiringli jarayonlar va isitma</a:t>
             </a:r>
@@ -1724,15 +1727,15 @@
       </p:sp>
       <p:sp>
         <p:nvSpPr>
-          <p:cNvPr id="307" name="r307"/>
-          <p:cNvSpPr>
-            <a:spLocks noGrp="1"/>
-          </p:cNvSpPr>
-          <p:nvPr/>
-        </p:nvSpPr>
-        <p:spPr>
-          <a:xfrm>
-            <a:off x="6372000" y="1821600"/>
+          <p:cNvPr id="24" name="r24"/>
+          <p:cNvSpPr>
+            <a:spLocks noGrp="1"/>
+          </p:cNvSpPr>
+          <p:nvPr/>
+        </p:nvSpPr>
+        <p:spPr>
+          <a:xfrm>
+            <a:off x="6372000" y="1836000"/>
             <a:ext cx="57600" cy="57600"/>
           </a:xfrm>
           <a:prstGeom prst="rect">
@@ -1753,14 +1756,14 @@
       </p:sp>
       <p:sp>
         <p:nvSpPr>
-          <p:cNvPr id="308" name="t308"/>
-          <p:cNvSpPr txBox="1"/>
-          <p:nvPr/>
-        </p:nvSpPr>
-        <p:spPr>
-          <a:xfrm>
-            <a:off x="6497999" y="1742400"/>
-            <a:ext cx="5094001" cy="270000"/>
+          <p:cNvPr id="25" name="t25"/>
+          <p:cNvSpPr txBox="1"/>
+          <p:nvPr/>
+        </p:nvSpPr>
+        <p:spPr>
+          <a:xfrm>
+            <a:off x="6497999" y="1756800"/>
+            <a:ext cx="5094001" cy="280800"/>
           </a:xfrm>
           <a:prstGeom prst="rect">
             <a:avLst/>
@@ -1780,7 +1783,7 @@
                 <a:solidFill>
                   <a:srgbClr val="5A3A40"/>
                 </a:solidFill>
-                <a:latin typeface="+mj-lt"/>
+                <a:latin typeface="Calibri"/>
               </a:rPr>
               <a:t>Qon ketish va qon kasalliklari</a:t>
             </a:r>
@@ -1789,15 +1792,15 @@
       </p:sp>
       <p:sp>
         <p:nvSpPr>
-          <p:cNvPr id="309" name="r309"/>
-          <p:cNvSpPr>
-            <a:spLocks noGrp="1"/>
-          </p:cNvSpPr>
-          <p:nvPr/>
-        </p:nvSpPr>
-        <p:spPr>
-          <a:xfrm>
-            <a:off x="6372000" y="2116800"/>
+          <p:cNvPr id="26" name="r26"/>
+          <p:cNvSpPr>
+            <a:spLocks noGrp="1"/>
+          </p:cNvSpPr>
+          <p:nvPr/>
+        </p:nvSpPr>
+        <p:spPr>
+          <a:xfrm>
+            <a:off x="6372000" y="2138400"/>
             <a:ext cx="57600" cy="57600"/>
           </a:xfrm>
           <a:prstGeom prst="rect">
@@ -1818,14 +1821,14 @@
       </p:sp>
       <p:sp>
         <p:nvSpPr>
-          <p:cNvPr id="310" name="t310"/>
-          <p:cNvSpPr txBox="1"/>
-          <p:nvPr/>
-        </p:nvSpPr>
-        <p:spPr>
-          <a:xfrm>
-            <a:off x="6497999" y="2037600"/>
-            <a:ext cx="5094001" cy="270000"/>
+          <p:cNvPr id="27" name="t27"/>
+          <p:cNvSpPr txBox="1"/>
+          <p:nvPr/>
+        </p:nvSpPr>
+        <p:spPr>
+          <a:xfrm>
+            <a:off x="6497999" y="2059200"/>
+            <a:ext cx="5094001" cy="280800"/>
           </a:xfrm>
           <a:prstGeom prst="rect">
             <a:avLst/>
@@ -1845,7 +1848,7 @@
                 <a:solidFill>
                   <a:srgbClr val="5A3A40"/>
                 </a:solidFill>
-                <a:latin typeface="+mj-lt"/>
+                <a:latin typeface="Calibri"/>
               </a:rPr>
               <a:t>Dekompensatsiyalangan og'ir holatlar</a:t>
             </a:r>
@@ -1854,15 +1857,15 @@
       </p:sp>
       <p:sp>
         <p:nvSpPr>
-          <p:cNvPr id="311" name="r311"/>
-          <p:cNvSpPr>
-            <a:spLocks noGrp="1"/>
-          </p:cNvSpPr>
-          <p:nvPr/>
-        </p:nvSpPr>
-        <p:spPr>
-          <a:xfrm>
-            <a:off x="6372000" y="2412000"/>
+          <p:cNvPr id="28" name="r28"/>
+          <p:cNvSpPr>
+            <a:spLocks noGrp="1"/>
+          </p:cNvSpPr>
+          <p:nvPr/>
+        </p:nvSpPr>
+        <p:spPr>
+          <a:xfrm>
+            <a:off x="6372000" y="2440800"/>
             <a:ext cx="57600" cy="57600"/>
           </a:xfrm>
           <a:prstGeom prst="rect">
@@ -1883,14 +1886,14 @@
       </p:sp>
       <p:sp>
         <p:nvSpPr>
-          <p:cNvPr id="312" name="t312"/>
-          <p:cNvSpPr txBox="1"/>
-          <p:nvPr/>
-        </p:nvSpPr>
-        <p:spPr>
-          <a:xfrm>
-            <a:off x="6497999" y="2332800"/>
-            <a:ext cx="5094001" cy="270000"/>
+          <p:cNvPr id="29" name="t29"/>
+          <p:cNvSpPr txBox="1"/>
+          <p:nvPr/>
+        </p:nvSpPr>
+        <p:spPr>
+          <a:xfrm>
+            <a:off x="6497999" y="2361600"/>
+            <a:ext cx="5094001" cy="280800"/>
           </a:xfrm>
           <a:prstGeom prst="rect">
             <a:avLst/>
@@ -1910,7 +1913,7 @@
                 <a:solidFill>
                   <a:srgbClr val="5A3A40"/>
                 </a:solidFill>
-                <a:latin typeface="+mj-lt"/>
+                <a:latin typeface="Calibri"/>
               </a:rPr>
               <a:t>Yurak-qon tomir yetishmovchiligi (og'ir)</a:t>
             </a:r>
@@ -1919,15 +1922,15 @@
       </p:sp>
       <p:sp>
         <p:nvSpPr>
-          <p:cNvPr id="313" name="r313"/>
-          <p:cNvSpPr>
-            <a:spLocks noGrp="1"/>
-          </p:cNvSpPr>
-          <p:nvPr/>
-        </p:nvSpPr>
-        <p:spPr>
-          <a:xfrm>
-            <a:off x="6372000" y="2707200"/>
+          <p:cNvPr id="30" name="r30"/>
+          <p:cNvSpPr>
+            <a:spLocks noGrp="1"/>
+          </p:cNvSpPr>
+          <p:nvPr/>
+        </p:nvSpPr>
+        <p:spPr>
+          <a:xfrm>
+            <a:off x="6372000" y="2743200"/>
             <a:ext cx="57600" cy="57600"/>
           </a:xfrm>
           <a:prstGeom prst="rect">
@@ -1948,14 +1951,14 @@
       </p:sp>
       <p:sp>
         <p:nvSpPr>
-          <p:cNvPr id="314" name="t314"/>
-          <p:cNvSpPr txBox="1"/>
-          <p:nvPr/>
-        </p:nvSpPr>
-        <p:spPr>
-          <a:xfrm>
-            <a:off x="6497999" y="2628000"/>
-            <a:ext cx="5094001" cy="270000"/>
+          <p:cNvPr id="31" name="t31"/>
+          <p:cNvSpPr txBox="1"/>
+          <p:nvPr/>
+        </p:nvSpPr>
+        <p:spPr>
+          <a:xfrm>
+            <a:off x="6497999" y="2664000"/>
+            <a:ext cx="5094001" cy="280800"/>
           </a:xfrm>
           <a:prstGeom prst="rect">
             <a:avLst/>
@@ -1975,7 +1978,7 @@
                 <a:solidFill>
                   <a:srgbClr val="5A3A40"/>
                 </a:solidFill>
-                <a:latin typeface="+mj-lt"/>
+                <a:latin typeface="Calibri"/>
               </a:rPr>
               <a:t>Fizik omilga individual chidamsizlik</a:t>
             </a:r>
@@ -2003,7 +2006,7 @@
     </p:bg>
     <p:spTree>
       <p:nvGrpSpPr>
-        <p:cNvPr id="1" name=""/>
+        <p:cNvPr id="1" name="slide"/>
         <p:cNvGrpSpPr/>
         <p:nvPr/>
       </p:nvGrpSpPr>
@@ -2017,7 +2020,7 @@
       </p:grpSpPr>
       <p:sp>
         <p:nvSpPr>
-          <p:cNvPr id="315" name="r315"/>
+          <p:cNvPr id="2" name="r2"/>
           <p:cNvSpPr>
             <a:spLocks noGrp="1"/>
           </p:cNvSpPr>
@@ -2046,7 +2049,7 @@
       </p:sp>
       <p:sp>
         <p:nvSpPr>
-          <p:cNvPr id="316" name="t316"/>
+          <p:cNvPr id="3" name="t3"/>
           <p:cNvSpPr txBox="1"/>
           <p:nvPr/>
         </p:nvSpPr>
@@ -2073,7 +2076,7 @@
                 <a:solidFill>
                   <a:srgbClr val="FFFFFF"/>
                 </a:solidFill>
-                <a:latin typeface="+mj-lt"/>
+                <a:latin typeface="Calibri"/>
               </a:rPr>
               <a:t>10 · INNOVATSION FIZIOTERAPIYA</a:t>
             </a:r>
@@ -2082,7 +2085,7 @@
       </p:sp>
       <p:sp>
         <p:nvSpPr>
-          <p:cNvPr id="317" name="r317"/>
+          <p:cNvPr id="4" name="r4"/>
           <p:cNvSpPr>
             <a:spLocks noGrp="1"/>
           </p:cNvSpPr>
@@ -2111,7 +2114,7 @@
       </p:sp>
       <p:sp>
         <p:nvSpPr>
-          <p:cNvPr id="318" name="r318"/>
+          <p:cNvPr id="5" name="r5"/>
           <p:cNvSpPr>
             <a:spLocks noGrp="1"/>
           </p:cNvSpPr>
@@ -2140,14 +2143,14 @@
       </p:sp>
       <p:sp>
         <p:nvSpPr>
-          <p:cNvPr id="319" name="t319"/>
-          <p:cNvSpPr txBox="1"/>
-          <p:nvPr/>
-        </p:nvSpPr>
-        <p:spPr>
-          <a:xfrm>
-            <a:off x="288000" y="892800"/>
-            <a:ext cx="3600000" cy="306000"/>
+          <p:cNvPr id="6" name="t6"/>
+          <p:cNvSpPr txBox="1"/>
+          <p:nvPr/>
+        </p:nvSpPr>
+        <p:spPr>
+          <a:xfrm>
+            <a:off x="288000" y="885600"/>
+            <a:ext cx="3636000" cy="306000"/>
           </a:xfrm>
           <a:prstGeom prst="rect">
             <a:avLst/>
@@ -2167,7 +2170,7 @@
                 <a:solidFill>
                   <a:srgbClr val="06262A"/>
                 </a:solidFill>
-                <a:latin typeface="+mj-lt"/>
+                <a:latin typeface="Calibri"/>
               </a:rPr>
               <a:t>Zarba to'lqinli terapiya</a:t>
             </a:r>
@@ -2176,14 +2179,14 @@
       </p:sp>
       <p:sp>
         <p:nvSpPr>
-          <p:cNvPr id="320" name="t320"/>
-          <p:cNvSpPr txBox="1"/>
-          <p:nvPr/>
-        </p:nvSpPr>
-        <p:spPr>
-          <a:xfrm>
-            <a:off x="288000" y="1188000"/>
-            <a:ext cx="3600000" cy="648000"/>
+          <p:cNvPr id="7" name="t7"/>
+          <p:cNvSpPr txBox="1"/>
+          <p:nvPr/>
+        </p:nvSpPr>
+        <p:spPr>
+          <a:xfrm>
+            <a:off x="288000" y="1206000"/>
+            <a:ext cx="3636000" cy="630000"/>
           </a:xfrm>
           <a:prstGeom prst="rect">
             <a:avLst/>
@@ -2203,7 +2206,7 @@
                 <a:solidFill>
                   <a:srgbClr val="5E7D80"/>
                 </a:solidFill>
-                <a:latin typeface="+mj-lt"/>
+                <a:latin typeface="Calibri"/>
               </a:rPr>
               <a:t>ED va Peyroni kasalligida angiogenez va to'qima yangilanishi.</a:t>
             </a:r>
@@ -2212,15 +2215,15 @@
       </p:sp>
       <p:sp>
         <p:nvSpPr>
-          <p:cNvPr id="321" name="r321"/>
-          <p:cNvSpPr>
-            <a:spLocks noGrp="1"/>
-          </p:cNvSpPr>
-          <p:nvPr/>
-        </p:nvSpPr>
-        <p:spPr>
-          <a:xfrm>
-            <a:off x="4176000" y="720000"/>
+          <p:cNvPr id="8" name="r8"/>
+          <p:cNvSpPr>
+            <a:spLocks noGrp="1"/>
+          </p:cNvSpPr>
+          <p:nvPr/>
+        </p:nvSpPr>
+        <p:spPr>
+          <a:xfrm>
+            <a:off x="4212000" y="720000"/>
             <a:ext cx="3816000" cy="1152000"/>
           </a:xfrm>
           <a:prstGeom prst="rect">
@@ -2241,15 +2244,15 @@
       </p:sp>
       <p:sp>
         <p:nvSpPr>
-          <p:cNvPr id="322" name="r322"/>
-          <p:cNvSpPr>
-            <a:spLocks noGrp="1"/>
-          </p:cNvSpPr>
-          <p:nvPr/>
-        </p:nvSpPr>
-        <p:spPr>
-          <a:xfrm>
-            <a:off x="4176000" y="720000"/>
+          <p:cNvPr id="9" name="r9"/>
+          <p:cNvSpPr>
+            <a:spLocks noGrp="1"/>
+          </p:cNvSpPr>
+          <p:nvPr/>
+        </p:nvSpPr>
+        <p:spPr>
+          <a:xfrm>
+            <a:off x="4212000" y="720000"/>
             <a:ext cx="3816000" cy="100800"/>
           </a:xfrm>
           <a:prstGeom prst="rect">
@@ -2270,14 +2273,14 @@
       </p:sp>
       <p:sp>
         <p:nvSpPr>
-          <p:cNvPr id="323" name="t323"/>
-          <p:cNvSpPr txBox="1"/>
-          <p:nvPr/>
-        </p:nvSpPr>
-        <p:spPr>
-          <a:xfrm>
-            <a:off x="4284000" y="892800"/>
-            <a:ext cx="3600000" cy="306000"/>
+          <p:cNvPr id="10" name="t10"/>
+          <p:cNvSpPr txBox="1"/>
+          <p:nvPr/>
+        </p:nvSpPr>
+        <p:spPr>
+          <a:xfrm>
+            <a:off x="4320000" y="885600"/>
+            <a:ext cx="3636000" cy="306000"/>
           </a:xfrm>
           <a:prstGeom prst="rect">
             <a:avLst/>
@@ -2297,7 +2300,7 @@
                 <a:solidFill>
                   <a:srgbClr val="06262A"/>
                 </a:solidFill>
-                <a:latin typeface="+mj-lt"/>
+                <a:latin typeface="Calibri"/>
               </a:rPr>
               <a:t>BFB platformalar</a:t>
             </a:r>
@@ -2306,14 +2309,14 @@
       </p:sp>
       <p:sp>
         <p:nvSpPr>
-          <p:cNvPr id="324" name="t324"/>
-          <p:cNvSpPr txBox="1"/>
-          <p:nvPr/>
-        </p:nvSpPr>
-        <p:spPr>
-          <a:xfrm>
-            <a:off x="4284000" y="1188000"/>
-            <a:ext cx="3600000" cy="648000"/>
+          <p:cNvPr id="11" name="t11"/>
+          <p:cNvSpPr txBox="1"/>
+          <p:nvPr/>
+        </p:nvSpPr>
+        <p:spPr>
+          <a:xfrm>
+            <a:off x="4320000" y="1206000"/>
+            <a:ext cx="3636000" cy="630000"/>
           </a:xfrm>
           <a:prstGeom prst="rect">
             <a:avLst/>
@@ -2333,7 +2336,7 @@
                 <a:solidFill>
                   <a:srgbClr val="5E7D80"/>
                 </a:solidFill>
-                <a:latin typeface="+mj-lt"/>
+                <a:latin typeface="Calibri"/>
               </a:rPr>
               <a:t>Aqlli sensorlar bilan tos tubi mushaklari treningi.</a:t>
             </a:r>
@@ -2342,15 +2345,15 @@
       </p:sp>
       <p:sp>
         <p:nvSpPr>
-          <p:cNvPr id="325" name="r325"/>
-          <p:cNvSpPr>
-            <a:spLocks noGrp="1"/>
-          </p:cNvSpPr>
-          <p:nvPr/>
-        </p:nvSpPr>
-        <p:spPr>
-          <a:xfrm>
-            <a:off x="8172000" y="720000"/>
+          <p:cNvPr id="12" name="r12"/>
+          <p:cNvSpPr>
+            <a:spLocks noGrp="1"/>
+          </p:cNvSpPr>
+          <p:nvPr/>
+        </p:nvSpPr>
+        <p:spPr>
+          <a:xfrm>
+            <a:off x="8244000" y="720000"/>
             <a:ext cx="3816000" cy="1152000"/>
           </a:xfrm>
           <a:prstGeom prst="rect">
@@ -2371,15 +2374,15 @@
       </p:sp>
       <p:sp>
         <p:nvSpPr>
-          <p:cNvPr id="326" name="r326"/>
-          <p:cNvSpPr>
-            <a:spLocks noGrp="1"/>
-          </p:cNvSpPr>
-          <p:nvPr/>
-        </p:nvSpPr>
-        <p:spPr>
-          <a:xfrm>
-            <a:off x="8172000" y="720000"/>
+          <p:cNvPr id="13" name="r13"/>
+          <p:cNvSpPr>
+            <a:spLocks noGrp="1"/>
+          </p:cNvSpPr>
+          <p:nvPr/>
+        </p:nvSpPr>
+        <p:spPr>
+          <a:xfrm>
+            <a:off x="8244000" y="720000"/>
             <a:ext cx="3816000" cy="100800"/>
           </a:xfrm>
           <a:prstGeom prst="rect">
@@ -2400,14 +2403,14 @@
       </p:sp>
       <p:sp>
         <p:nvSpPr>
-          <p:cNvPr id="327" name="t327"/>
-          <p:cNvSpPr txBox="1"/>
-          <p:nvPr/>
-        </p:nvSpPr>
-        <p:spPr>
-          <a:xfrm>
-            <a:off x="8280000" y="892800"/>
-            <a:ext cx="3600000" cy="306000"/>
+          <p:cNvPr id="14" name="t14"/>
+          <p:cNvSpPr txBox="1"/>
+          <p:nvPr/>
+        </p:nvSpPr>
+        <p:spPr>
+          <a:xfrm>
+            <a:off x="8352000" y="885600"/>
+            <a:ext cx="3636000" cy="306000"/>
           </a:xfrm>
           <a:prstGeom prst="rect">
             <a:avLst/>
@@ -2427,7 +2430,7 @@
                 <a:solidFill>
                   <a:srgbClr val="06262A"/>
                 </a:solidFill>
-                <a:latin typeface="+mj-lt"/>
+                <a:latin typeface="Calibri"/>
               </a:rPr>
               <a:t>Teletibbiyot + fizioterapiya</a:t>
             </a:r>
@@ -2436,14 +2439,14 @@
       </p:sp>
       <p:sp>
         <p:nvSpPr>
-          <p:cNvPr id="328" name="t328"/>
-          <p:cNvSpPr txBox="1"/>
-          <p:nvPr/>
-        </p:nvSpPr>
-        <p:spPr>
-          <a:xfrm>
-            <a:off x="8280000" y="1188000"/>
-            <a:ext cx="3600000" cy="648000"/>
+          <p:cNvPr id="15" name="t15"/>
+          <p:cNvSpPr txBox="1"/>
+          <p:nvPr/>
+        </p:nvSpPr>
+        <p:spPr>
+          <a:xfrm>
+            <a:off x="8352000" y="1206000"/>
+            <a:ext cx="3636000" cy="630000"/>
           </a:xfrm>
           <a:prstGeom prst="rect">
             <a:avLst/>
@@ -2463,7 +2466,7 @@
                 <a:solidFill>
                   <a:srgbClr val="5E7D80"/>
                 </a:solidFill>
-                <a:latin typeface="+mj-lt"/>
+                <a:latin typeface="Calibri"/>
               </a:rPr>
               <a:t>Masofadan reabilitatsiya nazorati va dasturlar.</a:t>
             </a:r>
@@ -2472,7 +2475,7 @@
       </p:sp>
       <p:sp>
         <p:nvSpPr>
-          <p:cNvPr id="329" name="r329"/>
+          <p:cNvPr id="16" name="r16"/>
           <p:cNvSpPr>
             <a:spLocks noGrp="1"/>
           </p:cNvSpPr>
@@ -2501,7 +2504,7 @@
       </p:sp>
       <p:sp>
         <p:nvSpPr>
-          <p:cNvPr id="330" name="t330"/>
+          <p:cNvPr id="17" name="t17"/>
           <p:cNvSpPr txBox="1"/>
           <p:nvPr/>
         </p:nvSpPr>
@@ -2528,7 +2531,7 @@
                 <a:solidFill>
                   <a:srgbClr val="13B3A6"/>
                 </a:solidFill>
-                <a:latin typeface="+mj-lt"/>
+                <a:latin typeface="Calibri"/>
               </a:rPr>
               <a:t>40%</a:t>
             </a:r>
@@ -2537,7 +2540,7 @@
       </p:sp>
       <p:sp>
         <p:nvSpPr>
-          <p:cNvPr id="331" name="t331"/>
+          <p:cNvPr id="18" name="t18"/>
           <p:cNvSpPr txBox="1"/>
           <p:nvPr/>
         </p:nvSpPr>
@@ -2564,7 +2567,7 @@
                 <a:solidFill>
                   <a:srgbClr val="5E7D80"/>
                 </a:solidFill>
-                <a:latin typeface="+mj-lt"/>
+                <a:latin typeface="Calibri"/>
               </a:rPr>
               <a:t>Surunkali og'riq kamayishi</a:t>
             </a:r>
@@ -2573,7 +2576,7 @@
       </p:sp>
       <p:sp>
         <p:nvSpPr>
-          <p:cNvPr id="332" name="r332"/>
+          <p:cNvPr id="19" name="r19"/>
           <p:cNvSpPr>
             <a:spLocks noGrp="1"/>
           </p:cNvSpPr>
@@ -2602,7 +2605,7 @@
       </p:sp>
       <p:sp>
         <p:nvSpPr>
-          <p:cNvPr id="333" name="t333"/>
+          <p:cNvPr id="20" name="t20"/>
           <p:cNvSpPr txBox="1"/>
           <p:nvPr/>
         </p:nvSpPr>
@@ -2629,7 +2632,7 @@
                 <a:solidFill>
                   <a:srgbClr val="13B3A6"/>
                 </a:solidFill>
-                <a:latin typeface="+mj-lt"/>
+                <a:latin typeface="Calibri"/>
               </a:rPr>
               <a:t>2x</a:t>
             </a:r>
@@ -2638,7 +2641,7 @@
       </p:sp>
       <p:sp>
         <p:nvSpPr>
-          <p:cNvPr id="334" name="t334"/>
+          <p:cNvPr id="21" name="t21"/>
           <p:cNvSpPr txBox="1"/>
           <p:nvPr/>
         </p:nvSpPr>
@@ -2665,7 +2668,7 @@
                 <a:solidFill>
                   <a:srgbClr val="5E7D80"/>
                 </a:solidFill>
-                <a:latin typeface="+mj-lt"/>
+                <a:latin typeface="Calibri"/>
               </a:rPr>
               <a:t>Reabilitatsiya tezligi</a:t>
             </a:r>
@@ -2674,7 +2677,7 @@
       </p:sp>
       <p:sp>
         <p:nvSpPr>
-          <p:cNvPr id="335" name="r335"/>
+          <p:cNvPr id="22" name="r22"/>
           <p:cNvSpPr>
             <a:spLocks noGrp="1"/>
           </p:cNvSpPr>
@@ -2703,7 +2706,7 @@
       </p:sp>
       <p:sp>
         <p:nvSpPr>
-          <p:cNvPr id="336" name="t336"/>
+          <p:cNvPr id="23" name="t23"/>
           <p:cNvSpPr txBox="1"/>
           <p:nvPr/>
         </p:nvSpPr>
@@ -2730,7 +2733,7 @@
                 <a:solidFill>
                   <a:srgbClr val="13B3A6"/>
                 </a:solidFill>
-                <a:latin typeface="+mj-lt"/>
+                <a:latin typeface="Calibri"/>
               </a:rPr>
               <a:t>90%+</a:t>
             </a:r>
@@ -2739,7 +2742,7 @@
       </p:sp>
       <p:sp>
         <p:nvSpPr>
-          <p:cNvPr id="337" name="t337"/>
+          <p:cNvPr id="24" name="t24"/>
           <p:cNvSpPr txBox="1"/>
           <p:nvPr/>
         </p:nvSpPr>
@@ -2766,7 +2769,7 @@
                 <a:solidFill>
                   <a:srgbClr val="5E7D80"/>
                 </a:solidFill>
-                <a:latin typeface="+mj-lt"/>
+                <a:latin typeface="Calibri"/>
               </a:rPr>
               <a:t>Bemorlar qoniqishi</a:t>
             </a:r>
@@ -2794,7 +2797,7 @@
     </p:bg>
     <p:spTree>
       <p:nvGrpSpPr>
-        <p:cNvPr id="1" name=""/>
+        <p:cNvPr id="1" name="slide"/>
         <p:cNvGrpSpPr/>
         <p:nvPr/>
       </p:nvGrpSpPr>
@@ -2808,7 +2811,7 @@
       </p:grpSpPr>
       <p:sp>
         <p:nvSpPr>
-          <p:cNvPr id="338" name="r338"/>
+          <p:cNvPr id="2" name="r2"/>
           <p:cNvSpPr>
             <a:spLocks noGrp="1"/>
           </p:cNvSpPr>
@@ -2837,7 +2840,7 @@
       </p:sp>
       <p:sp>
         <p:nvSpPr>
-          <p:cNvPr id="339" name="t339"/>
+          <p:cNvPr id="3" name="t3"/>
           <p:cNvSpPr txBox="1"/>
           <p:nvPr/>
         </p:nvSpPr>
@@ -2864,7 +2867,7 @@
                 <a:solidFill>
                   <a:srgbClr val="FFFFFF"/>
                 </a:solidFill>
-                <a:latin typeface="+mj-lt"/>
+                <a:latin typeface="Calibri"/>
               </a:rPr>
               <a:t>ASOSIY XULOSALAR</a:t>
             </a:r>
@@ -2873,7 +2876,7 @@
       </p:sp>
       <p:sp>
         <p:nvSpPr>
-          <p:cNvPr id="340" name="r340"/>
+          <p:cNvPr id="4" name="r4"/>
           <p:cNvSpPr>
             <a:spLocks noGrp="1"/>
           </p:cNvSpPr>
@@ -2902,14 +2905,14 @@
       </p:sp>
       <p:sp>
         <p:nvSpPr>
-          <p:cNvPr id="341" name="t341"/>
+          <p:cNvPr id="5" name="t5"/>
           <p:cNvSpPr txBox="1"/>
           <p:nvPr/>
         </p:nvSpPr>
         <p:spPr>
           <a:xfrm>
             <a:off x="485999" y="792000"/>
-            <a:ext cx="11034001" cy="270000"/>
+            <a:ext cx="11034001" cy="280800"/>
           </a:xfrm>
           <a:prstGeom prst="rect">
             <a:avLst/>
@@ -2929,7 +2932,7 @@
                 <a:solidFill>
                   <a:srgbClr val="06262A"/>
                 </a:solidFill>
-                <a:latin typeface="+mj-lt"/>
+                <a:latin typeface="Calibri"/>
               </a:rPr>
               <a:t>Fizioterapiya — akusherlik-ginekologiya va urologik-andrologiyada kompleks davolashning samarali bo'g'ini.</a:t>
             </a:r>
@@ -2938,15 +2941,15 @@
       </p:sp>
       <p:sp>
         <p:nvSpPr>
-          <p:cNvPr id="342" name="r342"/>
-          <p:cNvSpPr>
-            <a:spLocks noGrp="1"/>
-          </p:cNvSpPr>
-          <p:nvPr/>
-        </p:nvSpPr>
-        <p:spPr>
-          <a:xfrm>
-            <a:off x="360000" y="1166400"/>
+          <p:cNvPr id="6" name="r6"/>
+          <p:cNvSpPr>
+            <a:spLocks noGrp="1"/>
+          </p:cNvSpPr>
+          <p:nvPr/>
+        </p:nvSpPr>
+        <p:spPr>
+          <a:xfrm>
+            <a:off x="360000" y="1173600"/>
             <a:ext cx="57600" cy="57600"/>
           </a:xfrm>
           <a:prstGeom prst="rect">
@@ -2967,14 +2970,14 @@
       </p:sp>
       <p:sp>
         <p:nvSpPr>
-          <p:cNvPr id="343" name="t343"/>
-          <p:cNvSpPr txBox="1"/>
-          <p:nvPr/>
-        </p:nvSpPr>
-        <p:spPr>
-          <a:xfrm>
-            <a:off x="485999" y="1087200"/>
-            <a:ext cx="11034001" cy="270000"/>
+          <p:cNvPr id="7" name="t7"/>
+          <p:cNvSpPr txBox="1"/>
+          <p:nvPr/>
+        </p:nvSpPr>
+        <p:spPr>
+          <a:xfrm>
+            <a:off x="485999" y="1094400"/>
+            <a:ext cx="11034001" cy="280800"/>
           </a:xfrm>
           <a:prstGeom prst="rect">
             <a:avLst/>
@@ -2994,7 +2997,7 @@
                 <a:solidFill>
                   <a:srgbClr val="06262A"/>
                 </a:solidFill>
-                <a:latin typeface="+mj-lt"/>
+                <a:latin typeface="Calibri"/>
               </a:rPr>
               <a:t>Dorisiz, og'riqsiz va kam nojo'ya ta'sirli bo'lib, dorilar samarasini kuchaytiradi.</a:t>
             </a:r>
@@ -3003,15 +3006,15 @@
       </p:sp>
       <p:sp>
         <p:nvSpPr>
-          <p:cNvPr id="344" name="r344"/>
-          <p:cNvSpPr>
-            <a:spLocks noGrp="1"/>
-          </p:cNvSpPr>
-          <p:nvPr/>
-        </p:nvSpPr>
-        <p:spPr>
-          <a:xfrm>
-            <a:off x="360000" y="1461600"/>
+          <p:cNvPr id="8" name="r8"/>
+          <p:cNvSpPr>
+            <a:spLocks noGrp="1"/>
+          </p:cNvSpPr>
+          <p:nvPr/>
+        </p:nvSpPr>
+        <p:spPr>
+          <a:xfrm>
+            <a:off x="360000" y="1476000"/>
             <a:ext cx="57600" cy="57600"/>
           </a:xfrm>
           <a:prstGeom prst="rect">
@@ -3032,14 +3035,14 @@
       </p:sp>
       <p:sp>
         <p:nvSpPr>
-          <p:cNvPr id="345" name="t345"/>
-          <p:cNvSpPr txBox="1"/>
-          <p:nvPr/>
-        </p:nvSpPr>
-        <p:spPr>
-          <a:xfrm>
-            <a:off x="485999" y="1382400"/>
-            <a:ext cx="11034001" cy="270000"/>
+          <p:cNvPr id="9" name="t9"/>
+          <p:cNvSpPr txBox="1"/>
+          <p:nvPr/>
+        </p:nvSpPr>
+        <p:spPr>
+          <a:xfrm>
+            <a:off x="485999" y="1396800"/>
+            <a:ext cx="11034001" cy="280800"/>
           </a:xfrm>
           <a:prstGeom prst="rect">
             <a:avLst/>
@@ -3059,7 +3062,7 @@
                 <a:solidFill>
                   <a:srgbClr val="06262A"/>
                 </a:solidFill>
-                <a:latin typeface="+mj-lt"/>
+                <a:latin typeface="Calibri"/>
               </a:rPr>
               <a:t>Tos tubi reabilitatsiyasi va zamonaviy usullar hayot sifatini sezilarli oshiradi.</a:t>
             </a:r>
@@ -3068,15 +3071,15 @@
       </p:sp>
       <p:sp>
         <p:nvSpPr>
-          <p:cNvPr id="346" name="r346"/>
-          <p:cNvSpPr>
-            <a:spLocks noGrp="1"/>
-          </p:cNvSpPr>
-          <p:nvPr/>
-        </p:nvSpPr>
-        <p:spPr>
-          <a:xfrm>
-            <a:off x="360000" y="1756800"/>
+          <p:cNvPr id="10" name="r10"/>
+          <p:cNvSpPr>
+            <a:spLocks noGrp="1"/>
+          </p:cNvSpPr>
+          <p:nvPr/>
+        </p:nvSpPr>
+        <p:spPr>
+          <a:xfrm>
+            <a:off x="360000" y="1778400"/>
             <a:ext cx="57600" cy="57600"/>
           </a:xfrm>
           <a:prstGeom prst="rect">
@@ -3097,14 +3100,14 @@
       </p:sp>
       <p:sp>
         <p:nvSpPr>
-          <p:cNvPr id="347" name="t347"/>
-          <p:cNvSpPr txBox="1"/>
-          <p:nvPr/>
-        </p:nvSpPr>
-        <p:spPr>
-          <a:xfrm>
-            <a:off x="485999" y="1677600"/>
-            <a:ext cx="11034001" cy="270000"/>
+          <p:cNvPr id="11" name="t11"/>
+          <p:cNvSpPr txBox="1"/>
+          <p:nvPr/>
+        </p:nvSpPr>
+        <p:spPr>
+          <a:xfrm>
+            <a:off x="485999" y="1699200"/>
+            <a:ext cx="11034001" cy="280800"/>
           </a:xfrm>
           <a:prstGeom prst="rect">
             <a:avLst/>
@@ -3124,7 +3127,7 @@
                 <a:solidFill>
                   <a:srgbClr val="06262A"/>
                 </a:solidFill>
-                <a:latin typeface="+mj-lt"/>
+                <a:latin typeface="Calibri"/>
               </a:rPr>
               <a:t>Har bir holatda ko'rsatma va qarshi ko'rsatmalarni qat'iy hisobga olish shart.</a:t>
             </a:r>
@@ -3152,7 +3155,7 @@
     </p:bg>
     <p:spTree>
       <p:nvGrpSpPr>
-        <p:cNvPr id="1" name=""/>
+        <p:cNvPr id="1" name="slide"/>
         <p:cNvGrpSpPr/>
         <p:nvPr/>
       </p:nvGrpSpPr>
@@ -3166,7 +3169,7 @@
       </p:grpSpPr>
       <p:sp>
         <p:nvSpPr>
-          <p:cNvPr id="348" name="r348"/>
+          <p:cNvPr id="2" name="r2"/>
           <p:cNvSpPr>
             <a:spLocks noGrp="1"/>
           </p:cNvSpPr>
@@ -3195,7 +3198,7 @@
       </p:sp>
       <p:sp>
         <p:nvSpPr>
-          <p:cNvPr id="349" name="t349"/>
+          <p:cNvPr id="3" name="t3"/>
           <p:cNvSpPr txBox="1"/>
           <p:nvPr/>
         </p:nvSpPr>
@@ -3222,7 +3225,7 @@
                 <a:solidFill>
                   <a:srgbClr val="FFFFFF"/>
                 </a:solidFill>
-                <a:latin typeface="+mj-lt"/>
+                <a:latin typeface="Calibri"/>
               </a:rPr>
               <a:t>E'tiboringiz uchun rahmat!</a:t>
             </a:r>
@@ -3231,7 +3234,7 @@
       </p:sp>
       <p:sp>
         <p:nvSpPr>
-          <p:cNvPr id="350" name="t350"/>
+          <p:cNvPr id="4" name="t4"/>
           <p:cNvSpPr txBox="1"/>
           <p:nvPr/>
         </p:nvSpPr>
@@ -3258,7 +3261,7 @@
                 <a:solidFill>
                   <a:srgbClr val="1DE0C4"/>
                 </a:solidFill>
-                <a:latin typeface="+mj-lt"/>
+                <a:latin typeface="Calibri"/>
               </a:rPr>
               <a:t>Sog'lom reproduktiv salomatlik — sifatli hayot kaliti.</a:t>
             </a:r>
@@ -3267,7 +3270,7 @@
       </p:sp>
       <p:sp>
         <p:nvSpPr>
-          <p:cNvPr id="351" name="t351"/>
+          <p:cNvPr id="5" name="t5"/>
           <p:cNvSpPr txBox="1"/>
           <p:nvPr/>
         </p:nvSpPr>
@@ -3294,7 +3297,7 @@
                 <a:solidFill>
                   <a:srgbClr val="13B3A6"/>
                 </a:solidFill>
-                <a:latin typeface="+mj-lt"/>
+                <a:latin typeface="Calibri"/>
               </a:rPr>
               <a:t>PhysioMed  ·  2026</a:t>
             </a:r>
@@ -3322,7 +3325,7 @@
     </p:bg>
     <p:spTree>
       <p:nvGrpSpPr>
-        <p:cNvPr id="1" name=""/>
+        <p:cNvPr id="1" name="slide"/>
         <p:cNvGrpSpPr/>
         <p:nvPr/>
       </p:nvGrpSpPr>
@@ -3336,7 +3339,7 @@
       </p:grpSpPr>
       <p:sp>
         <p:nvSpPr>
-          <p:cNvPr id="107" name="r107"/>
+          <p:cNvPr id="2" name="r2"/>
           <p:cNvSpPr>
             <a:spLocks noGrp="1"/>
           </p:cNvSpPr>
@@ -3365,7 +3368,7 @@
       </p:sp>
       <p:sp>
         <p:nvSpPr>
-          <p:cNvPr id="108" name="t108"/>
+          <p:cNvPr id="3" name="t3"/>
           <p:cNvSpPr txBox="1"/>
           <p:nvPr/>
         </p:nvSpPr>
@@ -3392,7 +3395,7 @@
                 <a:solidFill>
                   <a:srgbClr val="FFFFFF"/>
                 </a:solidFill>
-                <a:latin typeface="+mj-lt"/>
+                <a:latin typeface="Calibri"/>
               </a:rPr>
               <a:t>TAQDIMOT REJASI</a:t>
             </a:r>
@@ -3401,7 +3404,7 @@
       </p:sp>
       <p:sp>
         <p:nvSpPr>
-          <p:cNvPr id="109" name="r109"/>
+          <p:cNvPr id="4" name="r4"/>
           <p:cNvSpPr>
             <a:spLocks noGrp="1"/>
           </p:cNvSpPr>
@@ -3430,14 +3433,14 @@
       </p:sp>
       <p:sp>
         <p:nvSpPr>
-          <p:cNvPr id="110" name="t110"/>
+          <p:cNvPr id="5" name="t5"/>
           <p:cNvSpPr txBox="1"/>
           <p:nvPr/>
         </p:nvSpPr>
         <p:spPr>
           <a:xfrm>
             <a:off x="341999" y="720000"/>
-            <a:ext cx="5274001" cy="270000"/>
+            <a:ext cx="5274001" cy="280800"/>
           </a:xfrm>
           <a:prstGeom prst="rect">
             <a:avLst/>
@@ -3457,7 +3460,7 @@
                 <a:solidFill>
                   <a:srgbClr val="06262A"/>
                 </a:solidFill>
-                <a:latin typeface="+mj-lt"/>
+                <a:latin typeface="Calibri"/>
               </a:rPr>
               <a:t>01 – Fizioterapiya tushunchasi va o'rni</a:t>
             </a:r>
@@ -3466,15 +3469,15 @@
       </p:sp>
       <p:sp>
         <p:nvSpPr>
-          <p:cNvPr id="111" name="r111"/>
-          <p:cNvSpPr>
-            <a:spLocks noGrp="1"/>
-          </p:cNvSpPr>
-          <p:nvPr/>
-        </p:nvSpPr>
-        <p:spPr>
-          <a:xfrm>
-            <a:off x="216000" y="1094400"/>
+          <p:cNvPr id="6" name="r6"/>
+          <p:cNvSpPr>
+            <a:spLocks noGrp="1"/>
+          </p:cNvSpPr>
+          <p:nvPr/>
+        </p:nvSpPr>
+        <p:spPr>
+          <a:xfrm>
+            <a:off x="216000" y="1101600"/>
             <a:ext cx="57600" cy="57600"/>
           </a:xfrm>
           <a:prstGeom prst="rect">
@@ -3495,14 +3498,14 @@
       </p:sp>
       <p:sp>
         <p:nvSpPr>
-          <p:cNvPr id="112" name="t112"/>
-          <p:cNvSpPr txBox="1"/>
-          <p:nvPr/>
-        </p:nvSpPr>
-        <p:spPr>
-          <a:xfrm>
-            <a:off x="341999" y="1015200"/>
-            <a:ext cx="5274001" cy="270000"/>
+          <p:cNvPr id="7" name="t7"/>
+          <p:cNvSpPr txBox="1"/>
+          <p:nvPr/>
+        </p:nvSpPr>
+        <p:spPr>
+          <a:xfrm>
+            <a:off x="341999" y="1022400"/>
+            <a:ext cx="5274001" cy="280800"/>
           </a:xfrm>
           <a:prstGeom prst="rect">
             <a:avLst/>
@@ -3522,7 +3525,7 @@
                 <a:solidFill>
                   <a:srgbClr val="06262A"/>
                 </a:solidFill>
-                <a:latin typeface="+mj-lt"/>
+                <a:latin typeface="Calibri"/>
               </a:rPr>
               <a:t>02 – Maqsad va vazifalari</a:t>
             </a:r>
@@ -3531,15 +3534,15 @@
       </p:sp>
       <p:sp>
         <p:nvSpPr>
-          <p:cNvPr id="113" name="r113"/>
-          <p:cNvSpPr>
-            <a:spLocks noGrp="1"/>
-          </p:cNvSpPr>
-          <p:nvPr/>
-        </p:nvSpPr>
-        <p:spPr>
-          <a:xfrm>
-            <a:off x="216000" y="1389600"/>
+          <p:cNvPr id="8" name="r8"/>
+          <p:cNvSpPr>
+            <a:spLocks noGrp="1"/>
+          </p:cNvSpPr>
+          <p:nvPr/>
+        </p:nvSpPr>
+        <p:spPr>
+          <a:xfrm>
+            <a:off x="216000" y="1404000"/>
             <a:ext cx="57600" cy="57600"/>
           </a:xfrm>
           <a:prstGeom prst="rect">
@@ -3560,14 +3563,14 @@
       </p:sp>
       <p:sp>
         <p:nvSpPr>
-          <p:cNvPr id="114" name="t114"/>
-          <p:cNvSpPr txBox="1"/>
-          <p:nvPr/>
-        </p:nvSpPr>
-        <p:spPr>
-          <a:xfrm>
-            <a:off x="341999" y="1310400"/>
-            <a:ext cx="5274001" cy="270000"/>
+          <p:cNvPr id="9" name="t9"/>
+          <p:cNvSpPr txBox="1"/>
+          <p:nvPr/>
+        </p:nvSpPr>
+        <p:spPr>
+          <a:xfrm>
+            <a:off x="341999" y="1324800"/>
+            <a:ext cx="5274001" cy="280800"/>
           </a:xfrm>
           <a:prstGeom prst="rect">
             <a:avLst/>
@@ -3587,7 +3590,7 @@
                 <a:solidFill>
                   <a:srgbClr val="06262A"/>
                 </a:solidFill>
-                <a:latin typeface="+mj-lt"/>
+                <a:latin typeface="Calibri"/>
               </a:rPr>
               <a:t>03 – Asosiy fizik omillar va usullar</a:t>
             </a:r>
@@ -3596,15 +3599,15 @@
       </p:sp>
       <p:sp>
         <p:nvSpPr>
-          <p:cNvPr id="115" name="r115"/>
-          <p:cNvSpPr>
-            <a:spLocks noGrp="1"/>
-          </p:cNvSpPr>
-          <p:nvPr/>
-        </p:nvSpPr>
-        <p:spPr>
-          <a:xfrm>
-            <a:off x="216000" y="1684800"/>
+          <p:cNvPr id="10" name="r10"/>
+          <p:cNvSpPr>
+            <a:spLocks noGrp="1"/>
+          </p:cNvSpPr>
+          <p:nvPr/>
+        </p:nvSpPr>
+        <p:spPr>
+          <a:xfrm>
+            <a:off x="216000" y="1706400"/>
             <a:ext cx="57600" cy="57600"/>
           </a:xfrm>
           <a:prstGeom prst="rect">
@@ -3625,14 +3628,14 @@
       </p:sp>
       <p:sp>
         <p:nvSpPr>
-          <p:cNvPr id="116" name="t116"/>
-          <p:cNvSpPr txBox="1"/>
-          <p:nvPr/>
-        </p:nvSpPr>
-        <p:spPr>
-          <a:xfrm>
-            <a:off x="341999" y="1605600"/>
-            <a:ext cx="5274001" cy="270000"/>
+          <p:cNvPr id="11" name="t11"/>
+          <p:cNvSpPr txBox="1"/>
+          <p:nvPr/>
+        </p:nvSpPr>
+        <p:spPr>
+          <a:xfrm>
+            <a:off x="341999" y="1627200"/>
+            <a:ext cx="5274001" cy="280800"/>
           </a:xfrm>
           <a:prstGeom prst="rect">
             <a:avLst/>
@@ -3652,7 +3655,7 @@
                 <a:solidFill>
                   <a:srgbClr val="06262A"/>
                 </a:solidFill>
-                <a:latin typeface="+mj-lt"/>
+                <a:latin typeface="Calibri"/>
               </a:rPr>
               <a:t>04 – Akusherlikda qo'llanilishi</a:t>
             </a:r>
@@ -3661,7 +3664,7 @@
       </p:sp>
       <p:sp>
         <p:nvSpPr>
-          <p:cNvPr id="117" name="r117"/>
+          <p:cNvPr id="12" name="r12"/>
           <p:cNvSpPr>
             <a:spLocks noGrp="1"/>
           </p:cNvSpPr>
@@ -3690,14 +3693,14 @@
       </p:sp>
       <p:sp>
         <p:nvSpPr>
-          <p:cNvPr id="118" name="t118"/>
+          <p:cNvPr id="13" name="t13"/>
           <p:cNvSpPr txBox="1"/>
           <p:nvPr/>
         </p:nvSpPr>
         <p:spPr>
           <a:xfrm>
             <a:off x="6245999" y="720000"/>
-            <a:ext cx="5634001" cy="270000"/>
+            <a:ext cx="5634001" cy="280800"/>
           </a:xfrm>
           <a:prstGeom prst="rect">
             <a:avLst/>
@@ -3717,7 +3720,7 @@
                 <a:solidFill>
                   <a:srgbClr val="06262A"/>
                 </a:solidFill>
-                <a:latin typeface="+mj-lt"/>
+                <a:latin typeface="Calibri"/>
               </a:rPr>
               <a:t>05 – Ginekologiyada qo'llanilishi</a:t>
             </a:r>
@@ -3726,15 +3729,15 @@
       </p:sp>
       <p:sp>
         <p:nvSpPr>
-          <p:cNvPr id="119" name="r119"/>
-          <p:cNvSpPr>
-            <a:spLocks noGrp="1"/>
-          </p:cNvSpPr>
-          <p:nvPr/>
-        </p:nvSpPr>
-        <p:spPr>
-          <a:xfrm>
-            <a:off x="6120000" y="1094400"/>
+          <p:cNvPr id="14" name="r14"/>
+          <p:cNvSpPr>
+            <a:spLocks noGrp="1"/>
+          </p:cNvSpPr>
+          <p:nvPr/>
+        </p:nvSpPr>
+        <p:spPr>
+          <a:xfrm>
+            <a:off x="6120000" y="1101600"/>
             <a:ext cx="57600" cy="57600"/>
           </a:xfrm>
           <a:prstGeom prst="rect">
@@ -3755,14 +3758,14 @@
       </p:sp>
       <p:sp>
         <p:nvSpPr>
-          <p:cNvPr id="120" name="t120"/>
-          <p:cNvSpPr txBox="1"/>
-          <p:nvPr/>
-        </p:nvSpPr>
-        <p:spPr>
-          <a:xfrm>
-            <a:off x="6245999" y="1015200"/>
-            <a:ext cx="5634001" cy="270000"/>
+          <p:cNvPr id="15" name="t15"/>
+          <p:cNvSpPr txBox="1"/>
+          <p:nvPr/>
+        </p:nvSpPr>
+        <p:spPr>
+          <a:xfrm>
+            <a:off x="6245999" y="1022400"/>
+            <a:ext cx="5634001" cy="280800"/>
           </a:xfrm>
           <a:prstGeom prst="rect">
             <a:avLst/>
@@ -3782,7 +3785,7 @@
                 <a:solidFill>
                   <a:srgbClr val="06262A"/>
                 </a:solidFill>
-                <a:latin typeface="+mj-lt"/>
+                <a:latin typeface="Calibri"/>
               </a:rPr>
               <a:t>06 – Tos tubi mushaklari reabilitatsiyasi</a:t>
             </a:r>
@@ -3791,15 +3794,15 @@
       </p:sp>
       <p:sp>
         <p:nvSpPr>
-          <p:cNvPr id="121" name="r121"/>
-          <p:cNvSpPr>
-            <a:spLocks noGrp="1"/>
-          </p:cNvSpPr>
-          <p:nvPr/>
-        </p:nvSpPr>
-        <p:spPr>
-          <a:xfrm>
-            <a:off x="6120000" y="1389600"/>
+          <p:cNvPr id="16" name="r16"/>
+          <p:cNvSpPr>
+            <a:spLocks noGrp="1"/>
+          </p:cNvSpPr>
+          <p:nvPr/>
+        </p:nvSpPr>
+        <p:spPr>
+          <a:xfrm>
+            <a:off x="6120000" y="1404000"/>
             <a:ext cx="57600" cy="57600"/>
           </a:xfrm>
           <a:prstGeom prst="rect">
@@ -3820,14 +3823,14 @@
       </p:sp>
       <p:sp>
         <p:nvSpPr>
-          <p:cNvPr id="122" name="t122"/>
-          <p:cNvSpPr txBox="1"/>
-          <p:nvPr/>
-        </p:nvSpPr>
-        <p:spPr>
-          <a:xfrm>
-            <a:off x="6245999" y="1310400"/>
-            <a:ext cx="5634001" cy="270000"/>
+          <p:cNvPr id="17" name="t17"/>
+          <p:cNvSpPr txBox="1"/>
+          <p:nvPr/>
+        </p:nvSpPr>
+        <p:spPr>
+          <a:xfrm>
+            <a:off x="6245999" y="1324800"/>
+            <a:ext cx="5634001" cy="280800"/>
           </a:xfrm>
           <a:prstGeom prst="rect">
             <a:avLst/>
@@ -3847,7 +3850,7 @@
                 <a:solidFill>
                   <a:srgbClr val="06262A"/>
                 </a:solidFill>
-                <a:latin typeface="+mj-lt"/>
+                <a:latin typeface="Calibri"/>
               </a:rPr>
               <a:t>07 – Urologiya va andrologiyada</a:t>
             </a:r>
@@ -3856,15 +3859,15 @@
       </p:sp>
       <p:sp>
         <p:nvSpPr>
-          <p:cNvPr id="123" name="r123"/>
-          <p:cNvSpPr>
-            <a:spLocks noGrp="1"/>
-          </p:cNvSpPr>
-          <p:nvPr/>
-        </p:nvSpPr>
-        <p:spPr>
-          <a:xfrm>
-            <a:off x="6120000" y="1684800"/>
+          <p:cNvPr id="18" name="r18"/>
+          <p:cNvSpPr>
+            <a:spLocks noGrp="1"/>
+          </p:cNvSpPr>
+          <p:nvPr/>
+        </p:nvSpPr>
+        <p:spPr>
+          <a:xfrm>
+            <a:off x="6120000" y="1706400"/>
             <a:ext cx="57600" cy="57600"/>
           </a:xfrm>
           <a:prstGeom prst="rect">
@@ -3885,14 +3888,14 @@
       </p:sp>
       <p:sp>
         <p:nvSpPr>
-          <p:cNvPr id="124" name="t124"/>
-          <p:cNvSpPr txBox="1"/>
-          <p:nvPr/>
-        </p:nvSpPr>
-        <p:spPr>
-          <a:xfrm>
-            <a:off x="6245999" y="1605600"/>
-            <a:ext cx="5634001" cy="270000"/>
+          <p:cNvPr id="19" name="t19"/>
+          <p:cNvSpPr txBox="1"/>
+          <p:nvPr/>
+        </p:nvSpPr>
+        <p:spPr>
+          <a:xfrm>
+            <a:off x="6245999" y="1627200"/>
+            <a:ext cx="5634001" cy="280800"/>
           </a:xfrm>
           <a:prstGeom prst="rect">
             <a:avLst/>
@@ -3912,7 +3915,7 @@
                 <a:solidFill>
                   <a:srgbClr val="06262A"/>
                 </a:solidFill>
-                <a:latin typeface="+mj-lt"/>
+                <a:latin typeface="Calibri"/>
               </a:rPr>
               <a:t>08 – Ko'rsatma, qarshi ko'rsatma, xulosa</a:t>
             </a:r>
@@ -3940,7 +3943,7 @@
     </p:bg>
     <p:spTree>
       <p:nvGrpSpPr>
-        <p:cNvPr id="1" name=""/>
+        <p:cNvPr id="1" name="slide"/>
         <p:cNvGrpSpPr/>
         <p:nvPr/>
       </p:nvGrpSpPr>
@@ -3954,7 +3957,7 @@
       </p:grpSpPr>
       <p:sp>
         <p:nvSpPr>
-          <p:cNvPr id="125" name="r125"/>
+          <p:cNvPr id="2" name="r2"/>
           <p:cNvSpPr>
             <a:spLocks noGrp="1"/>
           </p:cNvSpPr>
@@ -3983,7 +3986,7 @@
       </p:sp>
       <p:sp>
         <p:nvSpPr>
-          <p:cNvPr id="126" name="t126"/>
+          <p:cNvPr id="3" name="t3"/>
           <p:cNvSpPr txBox="1"/>
           <p:nvPr/>
         </p:nvSpPr>
@@ -4010,7 +4013,7 @@
                 <a:solidFill>
                   <a:srgbClr val="FFFFFF"/>
                 </a:solidFill>
-                <a:latin typeface="+mj-lt"/>
+                <a:latin typeface="Calibri"/>
               </a:rPr>
               <a:t>01 · FIZIOTERAPIYA NIMA?</a:t>
             </a:r>
@@ -4019,7 +4022,7 @@
       </p:sp>
       <p:sp>
         <p:nvSpPr>
-          <p:cNvPr id="127" name="r127"/>
+          <p:cNvPr id="4" name="r4"/>
           <p:cNvSpPr>
             <a:spLocks noGrp="1"/>
           </p:cNvSpPr>
@@ -4048,7 +4051,7 @@
       </p:sp>
       <p:sp>
         <p:nvSpPr>
-          <p:cNvPr id="128" name="t128"/>
+          <p:cNvPr id="5" name="t5"/>
           <p:cNvSpPr txBox="1"/>
           <p:nvPr/>
         </p:nvSpPr>
@@ -4075,7 +4078,7 @@
                 <a:solidFill>
                   <a:srgbClr val="06262A"/>
                 </a:solidFill>
-                <a:latin typeface="+mj-lt"/>
+                <a:latin typeface="Calibri"/>
               </a:rPr>
               <a:t>Fizioterapiya — tabiiy va sun'iy jismoniy omillar</a:t>
             </a:r>
@@ -4087,7 +4090,7 @@
                 <a:solidFill>
                   <a:srgbClr val="06262A"/>
                 </a:solidFill>
-                <a:latin typeface="+mj-lt"/>
+                <a:latin typeface="Calibri"/>
               </a:rPr>
               <a:t>(elektr, magnit, ultratovush, issiqlik, suv) yordamida</a:t>
             </a:r>
@@ -4099,7 +4102,7 @@
                 <a:solidFill>
                   <a:srgbClr val="06262A"/>
                 </a:solidFill>
-                <a:latin typeface="+mj-lt"/>
+                <a:latin typeface="Calibri"/>
               </a:rPr>
               <a:t>kasalliklarni davolash va organizmni tiklash sohasidir.</a:t>
             </a:r>
@@ -4108,7 +4111,7 @@
       </p:sp>
       <p:sp>
         <p:nvSpPr>
-          <p:cNvPr id="129" name="t129"/>
+          <p:cNvPr id="6" name="t6"/>
           <p:cNvSpPr txBox="1"/>
           <p:nvPr/>
         </p:nvSpPr>
@@ -4135,7 +4138,7 @@
                 <a:solidFill>
                   <a:srgbClr val="13B3A6"/>
                 </a:solidFill>
-                <a:latin typeface="+mj-lt"/>
+                <a:latin typeface="Calibri"/>
               </a:rPr>
               <a:t>Dorisiz  ·  Og'riqsiz  ·  Kam nojo'ya ta'sir</a:t>
             </a:r>
@@ -4144,7 +4147,7 @@
       </p:sp>
       <p:sp>
         <p:nvSpPr>
-          <p:cNvPr id="130" name="r130"/>
+          <p:cNvPr id="7" name="r7"/>
           <p:cNvSpPr>
             <a:spLocks noGrp="1"/>
           </p:cNvSpPr>
@@ -4173,7 +4176,7 @@
       </p:sp>
       <p:sp>
         <p:nvSpPr>
-          <p:cNvPr id="131" name="t131"/>
+          <p:cNvPr id="8" name="t8"/>
           <p:cNvSpPr txBox="1"/>
           <p:nvPr/>
         </p:nvSpPr>
@@ -4200,7 +4203,7 @@
                 <a:solidFill>
                   <a:srgbClr val="FFFFFF"/>
                 </a:solidFill>
-                <a:latin typeface="+mj-lt"/>
+                <a:latin typeface="Calibri"/>
               </a:rPr>
               <a:t>Reproduktiv tibbiyotda ahamiyati</a:t>
             </a:r>
@@ -4209,15 +4212,15 @@
       </p:sp>
       <p:sp>
         <p:nvSpPr>
-          <p:cNvPr id="132" name="r132"/>
-          <p:cNvSpPr>
-            <a:spLocks noGrp="1"/>
-          </p:cNvSpPr>
-          <p:nvPr/>
-        </p:nvSpPr>
-        <p:spPr>
-          <a:xfrm>
-            <a:off x="6623999" y="1303200"/>
+          <p:cNvPr id="9" name="r9"/>
+          <p:cNvSpPr>
+            <a:spLocks noGrp="1"/>
+          </p:cNvSpPr>
+          <p:nvPr/>
+        </p:nvSpPr>
+        <p:spPr>
+          <a:xfrm>
+            <a:off x="6623999" y="1339200"/>
             <a:ext cx="57600" cy="57600"/>
           </a:xfrm>
           <a:prstGeom prst="rect">
@@ -4238,14 +4241,14 @@
       </p:sp>
       <p:sp>
         <p:nvSpPr>
-          <p:cNvPr id="133" name="t133"/>
-          <p:cNvSpPr txBox="1"/>
-          <p:nvPr/>
-        </p:nvSpPr>
-        <p:spPr>
-          <a:xfrm>
-            <a:off x="6749998" y="1224000"/>
-            <a:ext cx="4914001" cy="270000"/>
+          <p:cNvPr id="10" name="t10"/>
+          <p:cNvSpPr txBox="1"/>
+          <p:nvPr/>
+        </p:nvSpPr>
+        <p:spPr>
+          <a:xfrm>
+            <a:off x="6749998" y="1260000"/>
+            <a:ext cx="4914001" cy="280800"/>
           </a:xfrm>
           <a:prstGeom prst="rect">
             <a:avLst/>
@@ -4265,7 +4268,7 @@
                 <a:solidFill>
                   <a:srgbClr val="FFFFFF"/>
                 </a:solidFill>
-                <a:latin typeface="+mj-lt"/>
+                <a:latin typeface="Calibri"/>
               </a:rPr>
               <a:t>Surunkali yallig'lanishlarni kamaytiradi</a:t>
             </a:r>
@@ -4274,15 +4277,15 @@
       </p:sp>
       <p:sp>
         <p:nvSpPr>
-          <p:cNvPr id="134" name="r134"/>
-          <p:cNvSpPr>
-            <a:spLocks noGrp="1"/>
-          </p:cNvSpPr>
-          <p:nvPr/>
-        </p:nvSpPr>
-        <p:spPr>
-          <a:xfrm>
-            <a:off x="6623999" y="1598400"/>
+          <p:cNvPr id="11" name="r11"/>
+          <p:cNvSpPr>
+            <a:spLocks noGrp="1"/>
+          </p:cNvSpPr>
+          <p:nvPr/>
+        </p:nvSpPr>
+        <p:spPr>
+          <a:xfrm>
+            <a:off x="6623999" y="1641600"/>
             <a:ext cx="57600" cy="57600"/>
           </a:xfrm>
           <a:prstGeom prst="rect">
@@ -4303,14 +4306,14 @@
       </p:sp>
       <p:sp>
         <p:nvSpPr>
-          <p:cNvPr id="135" name="t135"/>
-          <p:cNvSpPr txBox="1"/>
-          <p:nvPr/>
-        </p:nvSpPr>
-        <p:spPr>
-          <a:xfrm>
-            <a:off x="6749998" y="1519200"/>
-            <a:ext cx="4914001" cy="270000"/>
+          <p:cNvPr id="12" name="t12"/>
+          <p:cNvSpPr txBox="1"/>
+          <p:nvPr/>
+        </p:nvSpPr>
+        <p:spPr>
+          <a:xfrm>
+            <a:off x="6749998" y="1562400"/>
+            <a:ext cx="4914001" cy="280800"/>
           </a:xfrm>
           <a:prstGeom prst="rect">
             <a:avLst/>
@@ -4330,7 +4333,7 @@
                 <a:solidFill>
                   <a:srgbClr val="FFFFFF"/>
                 </a:solidFill>
-                <a:latin typeface="+mj-lt"/>
+                <a:latin typeface="Calibri"/>
               </a:rPr>
               <a:t>Qon va limfa aylanishini yaxshilaydi</a:t>
             </a:r>
@@ -4339,15 +4342,15 @@
       </p:sp>
       <p:sp>
         <p:nvSpPr>
-          <p:cNvPr id="136" name="r136"/>
-          <p:cNvSpPr>
-            <a:spLocks noGrp="1"/>
-          </p:cNvSpPr>
-          <p:nvPr/>
-        </p:nvSpPr>
-        <p:spPr>
-          <a:xfrm>
-            <a:off x="6623999" y="1893600"/>
+          <p:cNvPr id="13" name="r13"/>
+          <p:cNvSpPr>
+            <a:spLocks noGrp="1"/>
+          </p:cNvSpPr>
+          <p:nvPr/>
+        </p:nvSpPr>
+        <p:spPr>
+          <a:xfrm>
+            <a:off x="6623999" y="1944000"/>
             <a:ext cx="57600" cy="57600"/>
           </a:xfrm>
           <a:prstGeom prst="rect">
@@ -4368,14 +4371,14 @@
       </p:sp>
       <p:sp>
         <p:nvSpPr>
-          <p:cNvPr id="137" name="t137"/>
-          <p:cNvSpPr txBox="1"/>
-          <p:nvPr/>
-        </p:nvSpPr>
-        <p:spPr>
-          <a:xfrm>
-            <a:off x="6749998" y="1814400"/>
-            <a:ext cx="4914001" cy="270000"/>
+          <p:cNvPr id="14" name="t14"/>
+          <p:cNvSpPr txBox="1"/>
+          <p:nvPr/>
+        </p:nvSpPr>
+        <p:spPr>
+          <a:xfrm>
+            <a:off x="6749998" y="1864800"/>
+            <a:ext cx="4914001" cy="280800"/>
           </a:xfrm>
           <a:prstGeom prst="rect">
             <a:avLst/>
@@ -4395,7 +4398,7 @@
                 <a:solidFill>
                   <a:srgbClr val="FFFFFF"/>
                 </a:solidFill>
-                <a:latin typeface="+mj-lt"/>
+                <a:latin typeface="Calibri"/>
               </a:rPr>
               <a:t>Bitishmalar va og'riqni yumshatadi</a:t>
             </a:r>
@@ -4404,15 +4407,15 @@
       </p:sp>
       <p:sp>
         <p:nvSpPr>
-          <p:cNvPr id="138" name="r138"/>
-          <p:cNvSpPr>
-            <a:spLocks noGrp="1"/>
-          </p:cNvSpPr>
-          <p:nvPr/>
-        </p:nvSpPr>
-        <p:spPr>
-          <a:xfrm>
-            <a:off x="6623999" y="2188800"/>
+          <p:cNvPr id="15" name="r15"/>
+          <p:cNvSpPr>
+            <a:spLocks noGrp="1"/>
+          </p:cNvSpPr>
+          <p:nvPr/>
+        </p:nvSpPr>
+        <p:spPr>
+          <a:xfrm>
+            <a:off x="6623999" y="2246400"/>
             <a:ext cx="57600" cy="57600"/>
           </a:xfrm>
           <a:prstGeom prst="rect">
@@ -4433,14 +4436,14 @@
       </p:sp>
       <p:sp>
         <p:nvSpPr>
-          <p:cNvPr id="139" name="t139"/>
-          <p:cNvSpPr txBox="1"/>
-          <p:nvPr/>
-        </p:nvSpPr>
-        <p:spPr>
-          <a:xfrm>
-            <a:off x="6749998" y="2109600"/>
-            <a:ext cx="4914001" cy="270000"/>
+          <p:cNvPr id="16" name="t16"/>
+          <p:cNvSpPr txBox="1"/>
+          <p:nvPr/>
+        </p:nvSpPr>
+        <p:spPr>
+          <a:xfrm>
+            <a:off x="6749998" y="2167200"/>
+            <a:ext cx="4914001" cy="280800"/>
           </a:xfrm>
           <a:prstGeom prst="rect">
             <a:avLst/>
@@ -4460,7 +4463,7 @@
                 <a:solidFill>
                   <a:srgbClr val="FFFFFF"/>
                 </a:solidFill>
-                <a:latin typeface="+mj-lt"/>
+                <a:latin typeface="Calibri"/>
               </a:rPr>
               <a:t>Dorilar samarasini kuchaytiradi</a:t>
             </a:r>
@@ -4488,7 +4491,7 @@
     </p:bg>
     <p:spTree>
       <p:nvGrpSpPr>
-        <p:cNvPr id="1" name=""/>
+        <p:cNvPr id="1" name="slide"/>
         <p:cNvGrpSpPr/>
         <p:nvPr/>
       </p:nvGrpSpPr>
@@ -4502,7 +4505,7 @@
       </p:grpSpPr>
       <p:sp>
         <p:nvSpPr>
-          <p:cNvPr id="140" name="r140"/>
+          <p:cNvPr id="2" name="r2"/>
           <p:cNvSpPr>
             <a:spLocks noGrp="1"/>
           </p:cNvSpPr>
@@ -4531,7 +4534,7 @@
       </p:sp>
       <p:sp>
         <p:nvSpPr>
-          <p:cNvPr id="141" name="t141"/>
+          <p:cNvPr id="3" name="t3"/>
           <p:cNvSpPr txBox="1"/>
           <p:nvPr/>
         </p:nvSpPr>
@@ -4558,7 +4561,7 @@
                 <a:solidFill>
                   <a:srgbClr val="FFFFFF"/>
                 </a:solidFill>
-                <a:latin typeface="+mj-lt"/>
+                <a:latin typeface="Calibri"/>
               </a:rPr>
               <a:t>02 · FIZIOTERAPIYANING VAZIFALARI</a:t>
             </a:r>
@@ -4567,7 +4570,7 @@
       </p:sp>
       <p:sp>
         <p:nvSpPr>
-          <p:cNvPr id="142" name="r142"/>
+          <p:cNvPr id="4" name="r4"/>
           <p:cNvSpPr>
             <a:spLocks noGrp="1"/>
           </p:cNvSpPr>
@@ -4596,7 +4599,7 @@
       </p:sp>
       <p:sp>
         <p:nvSpPr>
-          <p:cNvPr id="143" name="r143"/>
+          <p:cNvPr id="5" name="r5"/>
           <p:cNvSpPr>
             <a:spLocks noGrp="1"/>
           </p:cNvSpPr>
@@ -4625,13 +4628,13 @@
       </p:sp>
       <p:sp>
         <p:nvSpPr>
-          <p:cNvPr id="144" name="t144"/>
-          <p:cNvSpPr txBox="1"/>
-          <p:nvPr/>
-        </p:nvSpPr>
-        <p:spPr>
-          <a:xfrm>
-            <a:off x="288000" y="882000"/>
+          <p:cNvPr id="6" name="t6"/>
+          <p:cNvSpPr txBox="1"/>
+          <p:nvPr/>
+        </p:nvSpPr>
+        <p:spPr>
+          <a:xfrm>
+            <a:off x="288000" y="885600"/>
             <a:ext cx="3600000" cy="306000"/>
           </a:xfrm>
           <a:prstGeom prst="rect">
@@ -4652,7 +4655,7 @@
                 <a:solidFill>
                   <a:srgbClr val="06262A"/>
                 </a:solidFill>
-                <a:latin typeface="+mj-lt"/>
+                <a:latin typeface="Calibri"/>
               </a:rPr>
               <a:t>Og'riqni bartaraf etish</a:t>
             </a:r>
@@ -4661,13 +4664,13 @@
       </p:sp>
       <p:sp>
         <p:nvSpPr>
-          <p:cNvPr id="145" name="t145"/>
-          <p:cNvSpPr txBox="1"/>
-          <p:nvPr/>
-        </p:nvSpPr>
-        <p:spPr>
-          <a:xfrm>
-            <a:off x="288000" y="1188000"/>
+          <p:cNvPr id="7" name="t7"/>
+          <p:cNvSpPr txBox="1"/>
+          <p:nvPr/>
+        </p:nvSpPr>
+        <p:spPr>
+          <a:xfrm>
+            <a:off x="288000" y="1206000"/>
             <a:ext cx="3600000" cy="503999"/>
           </a:xfrm>
           <a:prstGeom prst="rect">
@@ -4688,7 +4691,7 @@
                 <a:solidFill>
                   <a:srgbClr val="5E7D80"/>
                 </a:solidFill>
-                <a:latin typeface="+mj-lt"/>
+                <a:latin typeface="Calibri"/>
               </a:rPr>
               <a:t>Analgetik ta'sir orqali tos sohasidagi og'riqni kamaytirish.</a:t>
             </a:r>
@@ -4697,7 +4700,7 @@
       </p:sp>
       <p:sp>
         <p:nvSpPr>
-          <p:cNvPr id="146" name="r146"/>
+          <p:cNvPr id="8" name="r8"/>
           <p:cNvSpPr>
             <a:spLocks noGrp="1"/>
           </p:cNvSpPr>
@@ -4726,7 +4729,7 @@
       </p:sp>
       <p:sp>
         <p:nvSpPr>
-          <p:cNvPr id="147" name="r147"/>
+          <p:cNvPr id="9" name="r9"/>
           <p:cNvSpPr>
             <a:spLocks noGrp="1"/>
           </p:cNvSpPr>
@@ -4755,13 +4758,13 @@
       </p:sp>
       <p:sp>
         <p:nvSpPr>
-          <p:cNvPr id="148" name="t148"/>
-          <p:cNvSpPr txBox="1"/>
-          <p:nvPr/>
-        </p:nvSpPr>
-        <p:spPr>
-          <a:xfrm>
-            <a:off x="4284000" y="882000"/>
+          <p:cNvPr id="10" name="t10"/>
+          <p:cNvSpPr txBox="1"/>
+          <p:nvPr/>
+        </p:nvSpPr>
+        <p:spPr>
+          <a:xfrm>
+            <a:off x="4284000" y="885600"/>
             <a:ext cx="3600000" cy="306000"/>
           </a:xfrm>
           <a:prstGeom prst="rect">
@@ -4782,7 +4785,7 @@
                 <a:solidFill>
                   <a:srgbClr val="06262A"/>
                 </a:solidFill>
-                <a:latin typeface="+mj-lt"/>
+                <a:latin typeface="Calibri"/>
               </a:rPr>
               <a:t>Yallig'lanishga qarshi</a:t>
             </a:r>
@@ -4791,13 +4794,13 @@
       </p:sp>
       <p:sp>
         <p:nvSpPr>
-          <p:cNvPr id="149" name="t149"/>
-          <p:cNvSpPr txBox="1"/>
-          <p:nvPr/>
-        </p:nvSpPr>
-        <p:spPr>
-          <a:xfrm>
-            <a:off x="4284000" y="1188000"/>
+          <p:cNvPr id="11" name="t11"/>
+          <p:cNvSpPr txBox="1"/>
+          <p:nvPr/>
+        </p:nvSpPr>
+        <p:spPr>
+          <a:xfrm>
+            <a:off x="4284000" y="1206000"/>
             <a:ext cx="3600000" cy="503999"/>
           </a:xfrm>
           <a:prstGeom prst="rect">
@@ -4818,7 +4821,7 @@
                 <a:solidFill>
                   <a:srgbClr val="5E7D80"/>
                 </a:solidFill>
-                <a:latin typeface="+mj-lt"/>
+                <a:latin typeface="Calibri"/>
               </a:rPr>
               <a:t>Infiltratlarni so'rdirish, shishni kamaytirish.</a:t>
             </a:r>
@@ -4827,7 +4830,7 @@
       </p:sp>
       <p:sp>
         <p:nvSpPr>
-          <p:cNvPr id="150" name="r150"/>
+          <p:cNvPr id="12" name="r12"/>
           <p:cNvSpPr>
             <a:spLocks noGrp="1"/>
           </p:cNvSpPr>
@@ -4856,7 +4859,7 @@
       </p:sp>
       <p:sp>
         <p:nvSpPr>
-          <p:cNvPr id="151" name="r151"/>
+          <p:cNvPr id="13" name="r13"/>
           <p:cNvSpPr>
             <a:spLocks noGrp="1"/>
           </p:cNvSpPr>
@@ -4885,13 +4888,13 @@
       </p:sp>
       <p:sp>
         <p:nvSpPr>
-          <p:cNvPr id="152" name="t152"/>
-          <p:cNvSpPr txBox="1"/>
-          <p:nvPr/>
-        </p:nvSpPr>
-        <p:spPr>
-          <a:xfrm>
-            <a:off x="8280000" y="882000"/>
+          <p:cNvPr id="14" name="t14"/>
+          <p:cNvSpPr txBox="1"/>
+          <p:nvPr/>
+        </p:nvSpPr>
+        <p:spPr>
+          <a:xfrm>
+            <a:off x="8280000" y="885600"/>
             <a:ext cx="3600000" cy="306000"/>
           </a:xfrm>
           <a:prstGeom prst="rect">
@@ -4912,7 +4915,7 @@
                 <a:solidFill>
                   <a:srgbClr val="06262A"/>
                 </a:solidFill>
-                <a:latin typeface="+mj-lt"/>
+                <a:latin typeface="Calibri"/>
               </a:rPr>
               <a:t>Qon aylanishini yaxshilash</a:t>
             </a:r>
@@ -4921,13 +4924,13 @@
       </p:sp>
       <p:sp>
         <p:nvSpPr>
-          <p:cNvPr id="153" name="t153"/>
-          <p:cNvSpPr txBox="1"/>
-          <p:nvPr/>
-        </p:nvSpPr>
-        <p:spPr>
-          <a:xfrm>
-            <a:off x="8280000" y="1188000"/>
+          <p:cNvPr id="15" name="t15"/>
+          <p:cNvSpPr txBox="1"/>
+          <p:nvPr/>
+        </p:nvSpPr>
+        <p:spPr>
+          <a:xfrm>
+            <a:off x="8280000" y="1206000"/>
             <a:ext cx="3600000" cy="503999"/>
           </a:xfrm>
           <a:prstGeom prst="rect">
@@ -4948,7 +4951,7 @@
                 <a:solidFill>
                   <a:srgbClr val="5E7D80"/>
                 </a:solidFill>
-                <a:latin typeface="+mj-lt"/>
+                <a:latin typeface="Calibri"/>
               </a:rPr>
               <a:t>Mahalliy mikrosirkulyatsiya va to'qima oziqlanishi.</a:t>
             </a:r>
@@ -4957,7 +4960,7 @@
       </p:sp>
       <p:sp>
         <p:nvSpPr>
-          <p:cNvPr id="154" name="r154"/>
+          <p:cNvPr id="16" name="r16"/>
           <p:cNvSpPr>
             <a:spLocks noGrp="1"/>
           </p:cNvSpPr>
@@ -4986,7 +4989,7 @@
       </p:sp>
       <p:sp>
         <p:nvSpPr>
-          <p:cNvPr id="155" name="r155"/>
+          <p:cNvPr id="17" name="r17"/>
           <p:cNvSpPr>
             <a:spLocks noGrp="1"/>
           </p:cNvSpPr>
@@ -5015,13 +5018,13 @@
       </p:sp>
       <p:sp>
         <p:nvSpPr>
-          <p:cNvPr id="156" name="t156"/>
-          <p:cNvSpPr txBox="1"/>
-          <p:nvPr/>
-        </p:nvSpPr>
-        <p:spPr>
-          <a:xfrm>
-            <a:off x="288000" y="2051999"/>
+          <p:cNvPr id="18" name="t18"/>
+          <p:cNvSpPr txBox="1"/>
+          <p:nvPr/>
+        </p:nvSpPr>
+        <p:spPr>
+          <a:xfrm>
+            <a:off x="288000" y="2055599"/>
             <a:ext cx="3600000" cy="306000"/>
           </a:xfrm>
           <a:prstGeom prst="rect">
@@ -5042,7 +5045,7 @@
                 <a:solidFill>
                   <a:srgbClr val="06262A"/>
                 </a:solidFill>
-                <a:latin typeface="+mj-lt"/>
+                <a:latin typeface="Calibri"/>
               </a:rPr>
               <a:t>Funksiyani tiklash</a:t>
             </a:r>
@@ -5051,13 +5054,13 @@
       </p:sp>
       <p:sp>
         <p:nvSpPr>
-          <p:cNvPr id="157" name="t157"/>
-          <p:cNvSpPr txBox="1"/>
-          <p:nvPr/>
-        </p:nvSpPr>
-        <p:spPr>
-          <a:xfrm>
-            <a:off x="288000" y="2357999"/>
+          <p:cNvPr id="19" name="t19"/>
+          <p:cNvSpPr txBox="1"/>
+          <p:nvPr/>
+        </p:nvSpPr>
+        <p:spPr>
+          <a:xfrm>
+            <a:off x="288000" y="2375999"/>
             <a:ext cx="3600000" cy="503999"/>
           </a:xfrm>
           <a:prstGeom prst="rect">
@@ -5078,7 +5081,7 @@
                 <a:solidFill>
                   <a:srgbClr val="5E7D80"/>
                 </a:solidFill>
-                <a:latin typeface="+mj-lt"/>
+                <a:latin typeface="Calibri"/>
               </a:rPr>
               <a:t>Organlar va mushaklarning normal faoliyatini tiklash.</a:t>
             </a:r>
@@ -5087,7 +5090,7 @@
       </p:sp>
       <p:sp>
         <p:nvSpPr>
-          <p:cNvPr id="158" name="r158"/>
+          <p:cNvPr id="20" name="r20"/>
           <p:cNvSpPr>
             <a:spLocks noGrp="1"/>
           </p:cNvSpPr>
@@ -5116,7 +5119,7 @@
       </p:sp>
       <p:sp>
         <p:nvSpPr>
-          <p:cNvPr id="159" name="r159"/>
+          <p:cNvPr id="21" name="r21"/>
           <p:cNvSpPr>
             <a:spLocks noGrp="1"/>
           </p:cNvSpPr>
@@ -5145,13 +5148,13 @@
       </p:sp>
       <p:sp>
         <p:nvSpPr>
-          <p:cNvPr id="160" name="t160"/>
-          <p:cNvSpPr txBox="1"/>
-          <p:nvPr/>
-        </p:nvSpPr>
-        <p:spPr>
-          <a:xfrm>
-            <a:off x="4284000" y="2051999"/>
+          <p:cNvPr id="22" name="t22"/>
+          <p:cNvSpPr txBox="1"/>
+          <p:nvPr/>
+        </p:nvSpPr>
+        <p:spPr>
+          <a:xfrm>
+            <a:off x="4284000" y="2055599"/>
             <a:ext cx="3600000" cy="306000"/>
           </a:xfrm>
           <a:prstGeom prst="rect">
@@ -5172,7 +5175,7 @@
                 <a:solidFill>
                   <a:srgbClr val="06262A"/>
                 </a:solidFill>
-                <a:latin typeface="+mj-lt"/>
+                <a:latin typeface="Calibri"/>
               </a:rPr>
               <a:t>Profilaktika</a:t>
             </a:r>
@@ -5181,13 +5184,13 @@
       </p:sp>
       <p:sp>
         <p:nvSpPr>
-          <p:cNvPr id="161" name="t161"/>
-          <p:cNvSpPr txBox="1"/>
-          <p:nvPr/>
-        </p:nvSpPr>
-        <p:spPr>
-          <a:xfrm>
-            <a:off x="4284000" y="2357999"/>
+          <p:cNvPr id="23" name="t23"/>
+          <p:cNvSpPr txBox="1"/>
+          <p:nvPr/>
+        </p:nvSpPr>
+        <p:spPr>
+          <a:xfrm>
+            <a:off x="4284000" y="2375999"/>
             <a:ext cx="3600000" cy="503999"/>
           </a:xfrm>
           <a:prstGeom prst="rect">
@@ -5208,7 +5211,7 @@
                 <a:solidFill>
                   <a:srgbClr val="5E7D80"/>
                 </a:solidFill>
-                <a:latin typeface="+mj-lt"/>
+                <a:latin typeface="Calibri"/>
               </a:rPr>
               <a:t>Surunkalashuv va asoratlarning oldini olish.</a:t>
             </a:r>
@@ -5217,7 +5220,7 @@
       </p:sp>
       <p:sp>
         <p:nvSpPr>
-          <p:cNvPr id="162" name="r162"/>
+          <p:cNvPr id="24" name="r24"/>
           <p:cNvSpPr>
             <a:spLocks noGrp="1"/>
           </p:cNvSpPr>
@@ -5246,7 +5249,7 @@
       </p:sp>
       <p:sp>
         <p:nvSpPr>
-          <p:cNvPr id="163" name="r163"/>
+          <p:cNvPr id="25" name="r25"/>
           <p:cNvSpPr>
             <a:spLocks noGrp="1"/>
           </p:cNvSpPr>
@@ -5275,13 +5278,13 @@
       </p:sp>
       <p:sp>
         <p:nvSpPr>
-          <p:cNvPr id="164" name="t164"/>
-          <p:cNvSpPr txBox="1"/>
-          <p:nvPr/>
-        </p:nvSpPr>
-        <p:spPr>
-          <a:xfrm>
-            <a:off x="8280000" y="2051999"/>
+          <p:cNvPr id="26" name="t26"/>
+          <p:cNvSpPr txBox="1"/>
+          <p:nvPr/>
+        </p:nvSpPr>
+        <p:spPr>
+          <a:xfrm>
+            <a:off x="8280000" y="2055599"/>
             <a:ext cx="3600000" cy="306000"/>
           </a:xfrm>
           <a:prstGeom prst="rect">
@@ -5302,7 +5305,7 @@
                 <a:solidFill>
                   <a:srgbClr val="06262A"/>
                 </a:solidFill>
-                <a:latin typeface="+mj-lt"/>
+                <a:latin typeface="Calibri"/>
               </a:rPr>
               <a:t>Hayot sifatini oshirish</a:t>
             </a:r>
@@ -5311,13 +5314,13 @@
       </p:sp>
       <p:sp>
         <p:nvSpPr>
-          <p:cNvPr id="165" name="t165"/>
-          <p:cNvSpPr txBox="1"/>
-          <p:nvPr/>
-        </p:nvSpPr>
-        <p:spPr>
-          <a:xfrm>
-            <a:off x="8280000" y="2357999"/>
+          <p:cNvPr id="27" name="t27"/>
+          <p:cNvSpPr txBox="1"/>
+          <p:nvPr/>
+        </p:nvSpPr>
+        <p:spPr>
+          <a:xfrm>
+            <a:off x="8280000" y="2375999"/>
             <a:ext cx="3600000" cy="503999"/>
           </a:xfrm>
           <a:prstGeom prst="rect">
@@ -5338,7 +5341,7 @@
                 <a:solidFill>
                   <a:srgbClr val="5E7D80"/>
                 </a:solidFill>
-                <a:latin typeface="+mj-lt"/>
+                <a:latin typeface="Calibri"/>
               </a:rPr>
               <a:t>Reproduktiv salomatlik va umumiy holatni yaxshilash.</a:t>
             </a:r>
@@ -5366,7 +5369,7 @@
     </p:bg>
     <p:spTree>
       <p:nvGrpSpPr>
-        <p:cNvPr id="1" name=""/>
+        <p:cNvPr id="1" name="slide"/>
         <p:cNvGrpSpPr/>
         <p:nvPr/>
       </p:nvGrpSpPr>
@@ -5380,7 +5383,7 @@
       </p:grpSpPr>
       <p:sp>
         <p:nvSpPr>
-          <p:cNvPr id="166" name="r166"/>
+          <p:cNvPr id="2" name="r2"/>
           <p:cNvSpPr>
             <a:spLocks noGrp="1"/>
           </p:cNvSpPr>
@@ -5409,7 +5412,7 @@
       </p:sp>
       <p:sp>
         <p:nvSpPr>
-          <p:cNvPr id="167" name="t167"/>
+          <p:cNvPr id="3" name="t3"/>
           <p:cNvSpPr txBox="1"/>
           <p:nvPr/>
         </p:nvSpPr>
@@ -5436,7 +5439,7 @@
                 <a:solidFill>
                   <a:srgbClr val="FFFFFF"/>
                 </a:solidFill>
-                <a:latin typeface="+mj-lt"/>
+                <a:latin typeface="Calibri"/>
               </a:rPr>
               <a:t>03 · ASOSIY FIZIK OMILLAR VA USULLAR</a:t>
             </a:r>
@@ -5445,7 +5448,7 @@
       </p:sp>
       <p:sp>
         <p:nvSpPr>
-          <p:cNvPr id="168" name="r168"/>
+          <p:cNvPr id="4" name="r4"/>
           <p:cNvSpPr>
             <a:spLocks noGrp="1"/>
           </p:cNvSpPr>
@@ -5474,7 +5477,7 @@
       </p:sp>
       <p:sp>
         <p:nvSpPr>
-          <p:cNvPr id="169" name="r169"/>
+          <p:cNvPr id="5" name="r5"/>
           <p:cNvSpPr>
             <a:spLocks noGrp="1"/>
           </p:cNvSpPr>
@@ -5503,13 +5506,13 @@
       </p:sp>
       <p:sp>
         <p:nvSpPr>
-          <p:cNvPr id="170" name="t170"/>
-          <p:cNvSpPr txBox="1"/>
-          <p:nvPr/>
-        </p:nvSpPr>
-        <p:spPr>
-          <a:xfrm>
-            <a:off x="288000" y="882000"/>
+          <p:cNvPr id="6" name="t6"/>
+          <p:cNvSpPr txBox="1"/>
+          <p:nvPr/>
+        </p:nvSpPr>
+        <p:spPr>
+          <a:xfrm>
+            <a:off x="288000" y="885600"/>
             <a:ext cx="3600000" cy="306000"/>
           </a:xfrm>
           <a:prstGeom prst="rect">
@@ -5530,7 +5533,7 @@
                 <a:solidFill>
                   <a:srgbClr val="06262A"/>
                 </a:solidFill>
-                <a:latin typeface="+mj-lt"/>
+                <a:latin typeface="Calibri"/>
               </a:rPr>
               <a:t>Elektroterapiya</a:t>
             </a:r>
@@ -5539,13 +5542,13 @@
       </p:sp>
       <p:sp>
         <p:nvSpPr>
-          <p:cNvPr id="171" name="t171"/>
-          <p:cNvSpPr txBox="1"/>
-          <p:nvPr/>
-        </p:nvSpPr>
-        <p:spPr>
-          <a:xfrm>
-            <a:off x="288000" y="1188000"/>
+          <p:cNvPr id="7" name="t7"/>
+          <p:cNvSpPr txBox="1"/>
+          <p:nvPr/>
+        </p:nvSpPr>
+        <p:spPr>
+          <a:xfrm>
+            <a:off x="288000" y="1206000"/>
             <a:ext cx="3600000" cy="503999"/>
           </a:xfrm>
           <a:prstGeom prst="rect">
@@ -5566,7 +5569,7 @@
                 <a:solidFill>
                   <a:srgbClr val="5E7D80"/>
                 </a:solidFill>
-                <a:latin typeface="+mj-lt"/>
+                <a:latin typeface="Calibri"/>
               </a:rPr>
               <a:t>Galvanizatsiya, elektroforez, SMT, interferensiya toklari.</a:t>
             </a:r>
@@ -5575,7 +5578,7 @@
       </p:sp>
       <p:sp>
         <p:nvSpPr>
-          <p:cNvPr id="172" name="r172"/>
+          <p:cNvPr id="8" name="r8"/>
           <p:cNvSpPr>
             <a:spLocks noGrp="1"/>
           </p:cNvSpPr>
@@ -5604,7 +5607,7 @@
       </p:sp>
       <p:sp>
         <p:nvSpPr>
-          <p:cNvPr id="173" name="r173"/>
+          <p:cNvPr id="9" name="r9"/>
           <p:cNvSpPr>
             <a:spLocks noGrp="1"/>
           </p:cNvSpPr>
@@ -5633,13 +5636,13 @@
       </p:sp>
       <p:sp>
         <p:nvSpPr>
-          <p:cNvPr id="174" name="t174"/>
-          <p:cNvSpPr txBox="1"/>
-          <p:nvPr/>
-        </p:nvSpPr>
-        <p:spPr>
-          <a:xfrm>
-            <a:off x="4284000" y="882000"/>
+          <p:cNvPr id="10" name="t10"/>
+          <p:cNvSpPr txBox="1"/>
+          <p:nvPr/>
+        </p:nvSpPr>
+        <p:spPr>
+          <a:xfrm>
+            <a:off x="4284000" y="885600"/>
             <a:ext cx="3600000" cy="306000"/>
           </a:xfrm>
           <a:prstGeom prst="rect">
@@ -5660,7 +5663,7 @@
                 <a:solidFill>
                   <a:srgbClr val="06262A"/>
                 </a:solidFill>
-                <a:latin typeface="+mj-lt"/>
+                <a:latin typeface="Calibri"/>
               </a:rPr>
               <a:t>Magnitoterapiya</a:t>
             </a:r>
@@ -5669,13 +5672,13 @@
       </p:sp>
       <p:sp>
         <p:nvSpPr>
-          <p:cNvPr id="175" name="t175"/>
-          <p:cNvSpPr txBox="1"/>
-          <p:nvPr/>
-        </p:nvSpPr>
-        <p:spPr>
-          <a:xfrm>
-            <a:off x="4284000" y="1188000"/>
+          <p:cNvPr id="11" name="t11"/>
+          <p:cNvSpPr txBox="1"/>
+          <p:nvPr/>
+        </p:nvSpPr>
+        <p:spPr>
+          <a:xfrm>
+            <a:off x="4284000" y="1206000"/>
             <a:ext cx="3600000" cy="503999"/>
           </a:xfrm>
           <a:prstGeom prst="rect">
@@ -5696,7 +5699,7 @@
                 <a:solidFill>
                   <a:srgbClr val="5E7D80"/>
                 </a:solidFill>
-                <a:latin typeface="+mj-lt"/>
+                <a:latin typeface="Calibri"/>
               </a:rPr>
               <a:t>Doimiy va o'zgaruvchan magnit maydoni — yallig'lanishga qarshi.</a:t>
             </a:r>
@@ -5705,7 +5708,7 @@
       </p:sp>
       <p:sp>
         <p:nvSpPr>
-          <p:cNvPr id="176" name="r176"/>
+          <p:cNvPr id="12" name="r12"/>
           <p:cNvSpPr>
             <a:spLocks noGrp="1"/>
           </p:cNvSpPr>
@@ -5734,7 +5737,7 @@
       </p:sp>
       <p:sp>
         <p:nvSpPr>
-          <p:cNvPr id="177" name="r177"/>
+          <p:cNvPr id="13" name="r13"/>
           <p:cNvSpPr>
             <a:spLocks noGrp="1"/>
           </p:cNvSpPr>
@@ -5763,13 +5766,13 @@
       </p:sp>
       <p:sp>
         <p:nvSpPr>
-          <p:cNvPr id="178" name="t178"/>
-          <p:cNvSpPr txBox="1"/>
-          <p:nvPr/>
-        </p:nvSpPr>
-        <p:spPr>
-          <a:xfrm>
-            <a:off x="8280000" y="882000"/>
+          <p:cNvPr id="14" name="t14"/>
+          <p:cNvSpPr txBox="1"/>
+          <p:nvPr/>
+        </p:nvSpPr>
+        <p:spPr>
+          <a:xfrm>
+            <a:off x="8280000" y="885600"/>
             <a:ext cx="3600000" cy="306000"/>
           </a:xfrm>
           <a:prstGeom prst="rect">
@@ -5790,7 +5793,7 @@
                 <a:solidFill>
                   <a:srgbClr val="06262A"/>
                 </a:solidFill>
-                <a:latin typeface="+mj-lt"/>
+                <a:latin typeface="Calibri"/>
               </a:rPr>
               <a:t>Lazeroterapiya</a:t>
             </a:r>
@@ -5799,13 +5802,13 @@
       </p:sp>
       <p:sp>
         <p:nvSpPr>
-          <p:cNvPr id="179" name="t179"/>
-          <p:cNvSpPr txBox="1"/>
-          <p:nvPr/>
-        </p:nvSpPr>
-        <p:spPr>
-          <a:xfrm>
-            <a:off x="8280000" y="1188000"/>
+          <p:cNvPr id="15" name="t15"/>
+          <p:cNvSpPr txBox="1"/>
+          <p:nvPr/>
+        </p:nvSpPr>
+        <p:spPr>
+          <a:xfrm>
+            <a:off x="8280000" y="1206000"/>
             <a:ext cx="3600000" cy="503999"/>
           </a:xfrm>
           <a:prstGeom prst="rect">
@@ -5826,7 +5829,7 @@
                 <a:solidFill>
                   <a:srgbClr val="5E7D80"/>
                 </a:solidFill>
-                <a:latin typeface="+mj-lt"/>
+                <a:latin typeface="Calibri"/>
               </a:rPr>
               <a:t>Past intensivlikdagi lazer — to'qima regeneratsiyasini tezlashtiradi.</a:t>
             </a:r>
@@ -5835,7 +5838,7 @@
       </p:sp>
       <p:sp>
         <p:nvSpPr>
-          <p:cNvPr id="180" name="r180"/>
+          <p:cNvPr id="16" name="r16"/>
           <p:cNvSpPr>
             <a:spLocks noGrp="1"/>
           </p:cNvSpPr>
@@ -5864,7 +5867,7 @@
       </p:sp>
       <p:sp>
         <p:nvSpPr>
-          <p:cNvPr id="181" name="r181"/>
+          <p:cNvPr id="17" name="r17"/>
           <p:cNvSpPr>
             <a:spLocks noGrp="1"/>
           </p:cNvSpPr>
@@ -5893,13 +5896,13 @@
       </p:sp>
       <p:sp>
         <p:nvSpPr>
-          <p:cNvPr id="182" name="t182"/>
-          <p:cNvSpPr txBox="1"/>
-          <p:nvPr/>
-        </p:nvSpPr>
-        <p:spPr>
-          <a:xfrm>
-            <a:off x="288000" y="2051999"/>
+          <p:cNvPr id="18" name="t18"/>
+          <p:cNvSpPr txBox="1"/>
+          <p:nvPr/>
+        </p:nvSpPr>
+        <p:spPr>
+          <a:xfrm>
+            <a:off x="288000" y="2055599"/>
             <a:ext cx="3600000" cy="306000"/>
           </a:xfrm>
           <a:prstGeom prst="rect">
@@ -5920,7 +5923,7 @@
                 <a:solidFill>
                   <a:srgbClr val="06262A"/>
                 </a:solidFill>
-                <a:latin typeface="+mj-lt"/>
+                <a:latin typeface="Calibri"/>
               </a:rPr>
               <a:t>Ultratovush / Fonoforez</a:t>
             </a:r>
@@ -5929,13 +5932,13 @@
       </p:sp>
       <p:sp>
         <p:nvSpPr>
-          <p:cNvPr id="183" name="t183"/>
-          <p:cNvSpPr txBox="1"/>
-          <p:nvPr/>
-        </p:nvSpPr>
-        <p:spPr>
-          <a:xfrm>
-            <a:off x="288000" y="2357999"/>
+          <p:cNvPr id="19" name="t19"/>
+          <p:cNvSpPr txBox="1"/>
+          <p:nvPr/>
+        </p:nvSpPr>
+        <p:spPr>
+          <a:xfrm>
+            <a:off x="288000" y="2375999"/>
             <a:ext cx="3600000" cy="503999"/>
           </a:xfrm>
           <a:prstGeom prst="rect">
@@ -5956,7 +5959,7 @@
                 <a:solidFill>
                   <a:srgbClr val="5E7D80"/>
                 </a:solidFill>
-                <a:latin typeface="+mj-lt"/>
+                <a:latin typeface="Calibri"/>
               </a:rPr>
               <a:t>Mikromassaj effekti va dorilarni to'qimaga yetkazish.</a:t>
             </a:r>
@@ -5965,7 +5968,7 @@
       </p:sp>
       <p:sp>
         <p:nvSpPr>
-          <p:cNvPr id="184" name="r184"/>
+          <p:cNvPr id="20" name="r20"/>
           <p:cNvSpPr>
             <a:spLocks noGrp="1"/>
           </p:cNvSpPr>
@@ -5994,7 +5997,7 @@
       </p:sp>
       <p:sp>
         <p:nvSpPr>
-          <p:cNvPr id="185" name="r185"/>
+          <p:cNvPr id="21" name="r21"/>
           <p:cNvSpPr>
             <a:spLocks noGrp="1"/>
           </p:cNvSpPr>
@@ -6023,13 +6026,13 @@
       </p:sp>
       <p:sp>
         <p:nvSpPr>
-          <p:cNvPr id="186" name="t186"/>
-          <p:cNvSpPr txBox="1"/>
-          <p:nvPr/>
-        </p:nvSpPr>
-        <p:spPr>
-          <a:xfrm>
-            <a:off x="4284000" y="2051999"/>
+          <p:cNvPr id="22" name="t22"/>
+          <p:cNvSpPr txBox="1"/>
+          <p:nvPr/>
+        </p:nvSpPr>
+        <p:spPr>
+          <a:xfrm>
+            <a:off x="4284000" y="2055599"/>
             <a:ext cx="3600000" cy="306000"/>
           </a:xfrm>
           <a:prstGeom prst="rect">
@@ -6050,7 +6053,7 @@
                 <a:solidFill>
                   <a:srgbClr val="06262A"/>
                 </a:solidFill>
-                <a:latin typeface="+mj-lt"/>
+                <a:latin typeface="Calibri"/>
               </a:rPr>
               <a:t>Yorug'lik / UFO</a:t>
             </a:r>
@@ -6059,13 +6062,13 @@
       </p:sp>
       <p:sp>
         <p:nvSpPr>
-          <p:cNvPr id="187" name="t187"/>
-          <p:cNvSpPr txBox="1"/>
-          <p:nvPr/>
-        </p:nvSpPr>
-        <p:spPr>
-          <a:xfrm>
-            <a:off x="4284000" y="2357999"/>
+          <p:cNvPr id="23" name="t23"/>
+          <p:cNvSpPr txBox="1"/>
+          <p:nvPr/>
+        </p:nvSpPr>
+        <p:spPr>
+          <a:xfrm>
+            <a:off x="4284000" y="2375999"/>
             <a:ext cx="3600000" cy="503999"/>
           </a:xfrm>
           <a:prstGeom prst="rect">
@@ -6086,7 +6089,7 @@
                 <a:solidFill>
                   <a:srgbClr val="5E7D80"/>
                 </a:solidFill>
-                <a:latin typeface="+mj-lt"/>
+                <a:latin typeface="Calibri"/>
               </a:rPr>
               <a:t>Infraqizil, ultrabinafsha nurlanish — bakteritsid ta'sir.</a:t>
             </a:r>
@@ -6095,7 +6098,7 @@
       </p:sp>
       <p:sp>
         <p:nvSpPr>
-          <p:cNvPr id="188" name="r188"/>
+          <p:cNvPr id="24" name="r24"/>
           <p:cNvSpPr>
             <a:spLocks noGrp="1"/>
           </p:cNvSpPr>
@@ -6124,7 +6127,7 @@
       </p:sp>
       <p:sp>
         <p:nvSpPr>
-          <p:cNvPr id="189" name="r189"/>
+          <p:cNvPr id="25" name="r25"/>
           <p:cNvSpPr>
             <a:spLocks noGrp="1"/>
           </p:cNvSpPr>
@@ -6153,13 +6156,13 @@
       </p:sp>
       <p:sp>
         <p:nvSpPr>
-          <p:cNvPr id="190" name="t190"/>
-          <p:cNvSpPr txBox="1"/>
-          <p:nvPr/>
-        </p:nvSpPr>
-        <p:spPr>
-          <a:xfrm>
-            <a:off x="8280000" y="2051999"/>
+          <p:cNvPr id="26" name="t26"/>
+          <p:cNvSpPr txBox="1"/>
+          <p:nvPr/>
+        </p:nvSpPr>
+        <p:spPr>
+          <a:xfrm>
+            <a:off x="8280000" y="2055599"/>
             <a:ext cx="3600000" cy="306000"/>
           </a:xfrm>
           <a:prstGeom prst="rect">
@@ -6180,7 +6183,7 @@
                 <a:solidFill>
                   <a:srgbClr val="06262A"/>
                 </a:solidFill>
-                <a:latin typeface="+mj-lt"/>
+                <a:latin typeface="Calibri"/>
               </a:rPr>
               <a:t>Termoterapiya</a:t>
             </a:r>
@@ -6189,13 +6192,13 @@
       </p:sp>
       <p:sp>
         <p:nvSpPr>
-          <p:cNvPr id="191" name="t191"/>
-          <p:cNvSpPr txBox="1"/>
-          <p:nvPr/>
-        </p:nvSpPr>
-        <p:spPr>
-          <a:xfrm>
-            <a:off x="8280000" y="2357999"/>
+          <p:cNvPr id="27" name="t27"/>
+          <p:cNvSpPr txBox="1"/>
+          <p:nvPr/>
+        </p:nvSpPr>
+        <p:spPr>
+          <a:xfrm>
+            <a:off x="8280000" y="2375999"/>
             <a:ext cx="3600000" cy="503999"/>
           </a:xfrm>
           <a:prstGeom prst="rect">
@@ -6216,7 +6219,7 @@
                 <a:solidFill>
                   <a:srgbClr val="5E7D80"/>
                 </a:solidFill>
-                <a:latin typeface="+mj-lt"/>
+                <a:latin typeface="Calibri"/>
               </a:rPr>
               <a:t>Loy, parafin, mineral vannalar va kurort omillari.</a:t>
             </a:r>
@@ -6244,7 +6247,7 @@
     </p:bg>
     <p:spTree>
       <p:nvGrpSpPr>
-        <p:cNvPr id="1" name=""/>
+        <p:cNvPr id="1" name="slide"/>
         <p:cNvGrpSpPr/>
         <p:nvPr/>
       </p:nvGrpSpPr>
@@ -6258,7 +6261,7 @@
       </p:grpSpPr>
       <p:sp>
         <p:nvSpPr>
-          <p:cNvPr id="192" name="r192"/>
+          <p:cNvPr id="2" name="r2"/>
           <p:cNvSpPr>
             <a:spLocks noGrp="1"/>
           </p:cNvSpPr>
@@ -6287,7 +6290,7 @@
       </p:sp>
       <p:sp>
         <p:nvSpPr>
-          <p:cNvPr id="193" name="t193"/>
+          <p:cNvPr id="3" name="t3"/>
           <p:cNvSpPr txBox="1"/>
           <p:nvPr/>
         </p:nvSpPr>
@@ -6314,7 +6317,7 @@
                 <a:solidFill>
                   <a:srgbClr val="FFFFFF"/>
                 </a:solidFill>
-                <a:latin typeface="+mj-lt"/>
+                <a:latin typeface="Calibri"/>
               </a:rPr>
               <a:t>04 · AKUSHERLIKDA FIZIOTERAPIYA</a:t>
             </a:r>
@@ -6323,7 +6326,7 @@
       </p:sp>
       <p:sp>
         <p:nvSpPr>
-          <p:cNvPr id="194" name="r194"/>
+          <p:cNvPr id="4" name="r4"/>
           <p:cNvSpPr>
             <a:spLocks noGrp="1"/>
           </p:cNvSpPr>
@@ -6352,14 +6355,14 @@
       </p:sp>
       <p:sp>
         <p:nvSpPr>
-          <p:cNvPr id="195" name="t195"/>
+          <p:cNvPr id="5" name="t5"/>
           <p:cNvSpPr txBox="1"/>
           <p:nvPr/>
         </p:nvSpPr>
         <p:spPr>
           <a:xfrm>
             <a:off x="341999" y="720000"/>
-            <a:ext cx="5634001" cy="270000"/>
+            <a:ext cx="5634001" cy="280800"/>
           </a:xfrm>
           <a:prstGeom prst="rect">
             <a:avLst/>
@@ -6379,24 +6382,24 @@
                 <a:solidFill>
                   <a:srgbClr val="06262A"/>
                 </a:solidFill>
-                <a:latin typeface="+mj-lt"/>
-              </a:rPr>
-              <a:t>Homiladorlik davrida: erta toksikoz, bel og'riqlari, shishlarda (ko'rsatma bo'yicha)</a:t>
-            </a:r>
-          </a:p>
-        </p:txBody>
-      </p:sp>
-      <p:sp>
-        <p:nvSpPr>
-          <p:cNvPr id="196" name="r196"/>
-          <p:cNvSpPr>
-            <a:spLocks noGrp="1"/>
-          </p:cNvSpPr>
-          <p:nvPr/>
-        </p:nvSpPr>
-        <p:spPr>
-          <a:xfrm>
-            <a:off x="216000" y="1094400"/>
+                <a:latin typeface="Calibri"/>
+              </a:rPr>
+              <a:t>Homiladorlik davrida: erta toksikoz, bel og'riqlari (ko'rsatma bo'yicha)</a:t>
+            </a:r>
+          </a:p>
+        </p:txBody>
+      </p:sp>
+      <p:sp>
+        <p:nvSpPr>
+          <p:cNvPr id="6" name="r6"/>
+          <p:cNvSpPr>
+            <a:spLocks noGrp="1"/>
+          </p:cNvSpPr>
+          <p:nvPr/>
+        </p:nvSpPr>
+        <p:spPr>
+          <a:xfrm>
+            <a:off x="216000" y="1101600"/>
             <a:ext cx="57600" cy="57600"/>
           </a:xfrm>
           <a:prstGeom prst="rect">
@@ -6417,14 +6420,14 @@
       </p:sp>
       <p:sp>
         <p:nvSpPr>
-          <p:cNvPr id="197" name="t197"/>
-          <p:cNvSpPr txBox="1"/>
-          <p:nvPr/>
-        </p:nvSpPr>
-        <p:spPr>
-          <a:xfrm>
-            <a:off x="341999" y="1015200"/>
-            <a:ext cx="5634001" cy="270000"/>
+          <p:cNvPr id="7" name="t7"/>
+          <p:cNvSpPr txBox="1"/>
+          <p:nvPr/>
+        </p:nvSpPr>
+        <p:spPr>
+          <a:xfrm>
+            <a:off x="341999" y="1022400"/>
+            <a:ext cx="5634001" cy="280800"/>
           </a:xfrm>
           <a:prstGeom prst="rect">
             <a:avLst/>
@@ -6444,7 +6447,7 @@
                 <a:solidFill>
                   <a:srgbClr val="06262A"/>
                 </a:solidFill>
-                <a:latin typeface="+mj-lt"/>
+                <a:latin typeface="Calibri"/>
               </a:rPr>
               <a:t>Tug'ruqdan keyin: bachadon involyutsiyasini tezlashtirish, tikuvlar bitishi</a:t>
             </a:r>
@@ -6453,15 +6456,15 @@
       </p:sp>
       <p:sp>
         <p:nvSpPr>
-          <p:cNvPr id="198" name="r198"/>
-          <p:cNvSpPr>
-            <a:spLocks noGrp="1"/>
-          </p:cNvSpPr>
-          <p:nvPr/>
-        </p:nvSpPr>
-        <p:spPr>
-          <a:xfrm>
-            <a:off x="216000" y="1389600"/>
+          <p:cNvPr id="8" name="r8"/>
+          <p:cNvSpPr>
+            <a:spLocks noGrp="1"/>
+          </p:cNvSpPr>
+          <p:nvPr/>
+        </p:nvSpPr>
+        <p:spPr>
+          <a:xfrm>
+            <a:off x="216000" y="1404000"/>
             <a:ext cx="57600" cy="57600"/>
           </a:xfrm>
           <a:prstGeom prst="rect">
@@ -6482,14 +6485,14 @@
       </p:sp>
       <p:sp>
         <p:nvSpPr>
-          <p:cNvPr id="199" name="t199"/>
-          <p:cNvSpPr txBox="1"/>
-          <p:nvPr/>
-        </p:nvSpPr>
-        <p:spPr>
-          <a:xfrm>
-            <a:off x="341999" y="1310400"/>
-            <a:ext cx="5634001" cy="270000"/>
+          <p:cNvPr id="9" name="t9"/>
+          <p:cNvSpPr txBox="1"/>
+          <p:nvPr/>
+        </p:nvSpPr>
+        <p:spPr>
+          <a:xfrm>
+            <a:off x="341999" y="1324800"/>
+            <a:ext cx="5634001" cy="280800"/>
           </a:xfrm>
           <a:prstGeom prst="rect">
             <a:avLst/>
@@ -6509,7 +6512,7 @@
                 <a:solidFill>
                   <a:srgbClr val="06262A"/>
                 </a:solidFill>
-                <a:latin typeface="+mj-lt"/>
+                <a:latin typeface="Calibri"/>
               </a:rPr>
               <a:t>Laktostaz va mastit: ultratovush va magnit terapiya bilan davolash</a:t>
             </a:r>
@@ -6518,15 +6521,15 @@
       </p:sp>
       <p:sp>
         <p:nvSpPr>
-          <p:cNvPr id="200" name="r200"/>
-          <p:cNvSpPr>
-            <a:spLocks noGrp="1"/>
-          </p:cNvSpPr>
-          <p:nvPr/>
-        </p:nvSpPr>
-        <p:spPr>
-          <a:xfrm>
-            <a:off x="216000" y="1684800"/>
+          <p:cNvPr id="10" name="r10"/>
+          <p:cNvSpPr>
+            <a:spLocks noGrp="1"/>
+          </p:cNvSpPr>
+          <p:nvPr/>
+        </p:nvSpPr>
+        <p:spPr>
+          <a:xfrm>
+            <a:off x="216000" y="1706400"/>
             <a:ext cx="57600" cy="57600"/>
           </a:xfrm>
           <a:prstGeom prst="rect">
@@ -6547,14 +6550,14 @@
       </p:sp>
       <p:sp>
         <p:nvSpPr>
-          <p:cNvPr id="201" name="t201"/>
-          <p:cNvSpPr txBox="1"/>
-          <p:nvPr/>
-        </p:nvSpPr>
-        <p:spPr>
-          <a:xfrm>
-            <a:off x="341999" y="1605600"/>
-            <a:ext cx="5634001" cy="270000"/>
+          <p:cNvPr id="11" name="t11"/>
+          <p:cNvSpPr txBox="1"/>
+          <p:nvPr/>
+        </p:nvSpPr>
+        <p:spPr>
+          <a:xfrm>
+            <a:off x="341999" y="1627200"/>
+            <a:ext cx="5634001" cy="280800"/>
           </a:xfrm>
           <a:prstGeom prst="rect">
             <a:avLst/>
@@ -6574,7 +6577,7 @@
                 <a:solidFill>
                   <a:srgbClr val="06262A"/>
                 </a:solidFill>
-                <a:latin typeface="+mj-lt"/>
+                <a:latin typeface="Calibri"/>
               </a:rPr>
               <a:t>Episiotomiya / sezar: chandiqlarni yumshatish, bitishmalar profilaktikasi</a:t>
             </a:r>
@@ -6583,7 +6586,7 @@
       </p:sp>
       <p:sp>
         <p:nvSpPr>
-          <p:cNvPr id="202" name="r202"/>
+          <p:cNvPr id="12" name="r12"/>
           <p:cNvSpPr>
             <a:spLocks noGrp="1"/>
           </p:cNvSpPr>
@@ -6612,7 +6615,7 @@
       </p:sp>
       <p:sp>
         <p:nvSpPr>
-          <p:cNvPr id="203" name="t203"/>
+          <p:cNvPr id="13" name="t13"/>
           <p:cNvSpPr txBox="1"/>
           <p:nvPr/>
         </p:nvSpPr>
@@ -6639,7 +6642,7 @@
                 <a:solidFill>
                   <a:srgbClr val="FFFFFF"/>
                 </a:solidFill>
-                <a:latin typeface="+mj-lt"/>
+                <a:latin typeface="Calibri"/>
               </a:rPr>
               <a:t>Asosiy effektlar</a:t>
             </a:r>
@@ -6648,15 +6651,15 @@
       </p:sp>
       <p:sp>
         <p:nvSpPr>
-          <p:cNvPr id="204" name="r204"/>
-          <p:cNvSpPr>
-            <a:spLocks noGrp="1"/>
-          </p:cNvSpPr>
-          <p:nvPr/>
-        </p:nvSpPr>
-        <p:spPr>
-          <a:xfrm>
-            <a:off x="6623999" y="1303200"/>
+          <p:cNvPr id="14" name="r14"/>
+          <p:cNvSpPr>
+            <a:spLocks noGrp="1"/>
+          </p:cNvSpPr>
+          <p:nvPr/>
+        </p:nvSpPr>
+        <p:spPr>
+          <a:xfrm>
+            <a:off x="6623999" y="1339200"/>
             <a:ext cx="57600" cy="57600"/>
           </a:xfrm>
           <a:prstGeom prst="rect">
@@ -6677,14 +6680,14 @@
       </p:sp>
       <p:sp>
         <p:nvSpPr>
-          <p:cNvPr id="205" name="t205"/>
-          <p:cNvSpPr txBox="1"/>
-          <p:nvPr/>
-        </p:nvSpPr>
-        <p:spPr>
-          <a:xfrm>
-            <a:off x="6749998" y="1224000"/>
-            <a:ext cx="4914001" cy="270000"/>
+          <p:cNvPr id="15" name="t15"/>
+          <p:cNvSpPr txBox="1"/>
+          <p:nvPr/>
+        </p:nvSpPr>
+        <p:spPr>
+          <a:xfrm>
+            <a:off x="6749998" y="1260000"/>
+            <a:ext cx="4914001" cy="280800"/>
           </a:xfrm>
           <a:prstGeom prst="rect">
             <a:avLst/>
@@ -6704,7 +6707,7 @@
                 <a:solidFill>
                   <a:srgbClr val="FFFFFF"/>
                 </a:solidFill>
-                <a:latin typeface="+mj-lt"/>
+                <a:latin typeface="Calibri"/>
               </a:rPr>
               <a:t>Bachadon qisqaruvini rag'batlantirish</a:t>
             </a:r>
@@ -6713,15 +6716,15 @@
       </p:sp>
       <p:sp>
         <p:nvSpPr>
-          <p:cNvPr id="206" name="r206"/>
-          <p:cNvSpPr>
-            <a:spLocks noGrp="1"/>
-          </p:cNvSpPr>
-          <p:nvPr/>
-        </p:nvSpPr>
-        <p:spPr>
-          <a:xfrm>
-            <a:off x="6623999" y="1598400"/>
+          <p:cNvPr id="16" name="r16"/>
+          <p:cNvSpPr>
+            <a:spLocks noGrp="1"/>
+          </p:cNvSpPr>
+          <p:nvPr/>
+        </p:nvSpPr>
+        <p:spPr>
+          <a:xfrm>
+            <a:off x="6623999" y="1641600"/>
             <a:ext cx="57600" cy="57600"/>
           </a:xfrm>
           <a:prstGeom prst="rect">
@@ -6742,14 +6745,14 @@
       </p:sp>
       <p:sp>
         <p:nvSpPr>
-          <p:cNvPr id="207" name="t207"/>
-          <p:cNvSpPr txBox="1"/>
-          <p:nvPr/>
-        </p:nvSpPr>
-        <p:spPr>
-          <a:xfrm>
-            <a:off x="6749998" y="1519200"/>
-            <a:ext cx="4914001" cy="270000"/>
+          <p:cNvPr id="17" name="t17"/>
+          <p:cNvSpPr txBox="1"/>
+          <p:nvPr/>
+        </p:nvSpPr>
+        <p:spPr>
+          <a:xfrm>
+            <a:off x="6749998" y="1562400"/>
+            <a:ext cx="4914001" cy="280800"/>
           </a:xfrm>
           <a:prstGeom prst="rect">
             <a:avLst/>
@@ -6769,7 +6772,7 @@
                 <a:solidFill>
                   <a:srgbClr val="FFFFFF"/>
                 </a:solidFill>
-                <a:latin typeface="+mj-lt"/>
+                <a:latin typeface="Calibri"/>
               </a:rPr>
               <a:t>Yiringli-yallig'lanish asoratlari profilaktikasi</a:t>
             </a:r>
@@ -6778,15 +6781,15 @@
       </p:sp>
       <p:sp>
         <p:nvSpPr>
-          <p:cNvPr id="208" name="r208"/>
-          <p:cNvSpPr>
-            <a:spLocks noGrp="1"/>
-          </p:cNvSpPr>
-          <p:nvPr/>
-        </p:nvSpPr>
-        <p:spPr>
-          <a:xfrm>
-            <a:off x="6623999" y="1893600"/>
+          <p:cNvPr id="18" name="r18"/>
+          <p:cNvSpPr>
+            <a:spLocks noGrp="1"/>
+          </p:cNvSpPr>
+          <p:nvPr/>
+        </p:nvSpPr>
+        <p:spPr>
+          <a:xfrm>
+            <a:off x="6623999" y="1944000"/>
             <a:ext cx="57600" cy="57600"/>
           </a:xfrm>
           <a:prstGeom prst="rect">
@@ -6807,14 +6810,14 @@
       </p:sp>
       <p:sp>
         <p:nvSpPr>
-          <p:cNvPr id="209" name="t209"/>
-          <p:cNvSpPr txBox="1"/>
-          <p:nvPr/>
-        </p:nvSpPr>
-        <p:spPr>
-          <a:xfrm>
-            <a:off x="6749998" y="1814400"/>
-            <a:ext cx="4914001" cy="270000"/>
+          <p:cNvPr id="19" name="t19"/>
+          <p:cNvSpPr txBox="1"/>
+          <p:nvPr/>
+        </p:nvSpPr>
+        <p:spPr>
+          <a:xfrm>
+            <a:off x="6749998" y="1864800"/>
+            <a:ext cx="4914001" cy="280800"/>
           </a:xfrm>
           <a:prstGeom prst="rect">
             <a:avLst/>
@@ -6834,7 +6837,7 @@
                 <a:solidFill>
                   <a:srgbClr val="FFFFFF"/>
                 </a:solidFill>
-                <a:latin typeface="+mj-lt"/>
+                <a:latin typeface="Calibri"/>
               </a:rPr>
               <a:t>Tikuvlar tez bitishi va og'riq kamayishi</a:t>
             </a:r>
@@ -6843,15 +6846,15 @@
       </p:sp>
       <p:sp>
         <p:nvSpPr>
-          <p:cNvPr id="210" name="r210"/>
-          <p:cNvSpPr>
-            <a:spLocks noGrp="1"/>
-          </p:cNvSpPr>
-          <p:nvPr/>
-        </p:nvSpPr>
-        <p:spPr>
-          <a:xfrm>
-            <a:off x="6623999" y="2188800"/>
+          <p:cNvPr id="20" name="r20"/>
+          <p:cNvSpPr>
+            <a:spLocks noGrp="1"/>
+          </p:cNvSpPr>
+          <p:nvPr/>
+        </p:nvSpPr>
+        <p:spPr>
+          <a:xfrm>
+            <a:off x="6623999" y="2246400"/>
             <a:ext cx="57600" cy="57600"/>
           </a:xfrm>
           <a:prstGeom prst="rect">
@@ -6872,14 +6875,14 @@
       </p:sp>
       <p:sp>
         <p:nvSpPr>
-          <p:cNvPr id="211" name="t211"/>
-          <p:cNvSpPr txBox="1"/>
-          <p:nvPr/>
-        </p:nvSpPr>
-        <p:spPr>
-          <a:xfrm>
-            <a:off x="6749998" y="2109600"/>
-            <a:ext cx="4914001" cy="270000"/>
+          <p:cNvPr id="21" name="t21"/>
+          <p:cNvSpPr txBox="1"/>
+          <p:nvPr/>
+        </p:nvSpPr>
+        <p:spPr>
+          <a:xfrm>
+            <a:off x="6749998" y="2167200"/>
+            <a:ext cx="4914001" cy="280800"/>
           </a:xfrm>
           <a:prstGeom prst="rect">
             <a:avLst/>
@@ -6899,7 +6902,7 @@
                 <a:solidFill>
                   <a:srgbClr val="FFFFFF"/>
                 </a:solidFill>
-                <a:latin typeface="+mj-lt"/>
+                <a:latin typeface="Calibri"/>
               </a:rPr>
               <a:t>Laktatsiyani me'yorlashtirish</a:t>
             </a:r>
@@ -6927,7 +6930,7 @@
     </p:bg>
     <p:spTree>
       <p:nvGrpSpPr>
-        <p:cNvPr id="1" name=""/>
+        <p:cNvPr id="1" name="slide"/>
         <p:cNvGrpSpPr/>
         <p:nvPr/>
       </p:nvGrpSpPr>
@@ -6941,7 +6944,7 @@
       </p:grpSpPr>
       <p:sp>
         <p:nvSpPr>
-          <p:cNvPr id="212" name="r212"/>
+          <p:cNvPr id="2" name="r2"/>
           <p:cNvSpPr>
             <a:spLocks noGrp="1"/>
           </p:cNvSpPr>
@@ -6970,7 +6973,7 @@
       </p:sp>
       <p:sp>
         <p:nvSpPr>
-          <p:cNvPr id="213" name="t213"/>
+          <p:cNvPr id="3" name="t3"/>
           <p:cNvSpPr txBox="1"/>
           <p:nvPr/>
         </p:nvSpPr>
@@ -6997,7 +7000,7 @@
                 <a:solidFill>
                   <a:srgbClr val="FFFFFF"/>
                 </a:solidFill>
-                <a:latin typeface="+mj-lt"/>
+                <a:latin typeface="Calibri"/>
               </a:rPr>
               <a:t>05 · GINEKOLOGIYADA FIZIOTERAPIYA</a:t>
             </a:r>
@@ -7006,7 +7009,7 @@
       </p:sp>
       <p:sp>
         <p:nvSpPr>
-          <p:cNvPr id="214" name="r214"/>
+          <p:cNvPr id="4" name="r4"/>
           <p:cNvSpPr>
             <a:spLocks noGrp="1"/>
           </p:cNvSpPr>
@@ -7035,7 +7038,7 @@
       </p:sp>
       <p:sp>
         <p:nvSpPr>
-          <p:cNvPr id="215" name="r215"/>
+          <p:cNvPr id="5" name="r5"/>
           <p:cNvSpPr>
             <a:spLocks noGrp="1"/>
           </p:cNvSpPr>
@@ -7064,7 +7067,7 @@
       </p:sp>
       <p:sp>
         <p:nvSpPr>
-          <p:cNvPr id="216" name="t216"/>
+          <p:cNvPr id="6" name="t6"/>
           <p:cNvSpPr txBox="1"/>
           <p:nvPr/>
         </p:nvSpPr>
@@ -7091,7 +7094,7 @@
                 <a:solidFill>
                   <a:srgbClr val="06262A"/>
                 </a:solidFill>
-                <a:latin typeface="+mj-lt"/>
+                <a:latin typeface="Calibri"/>
               </a:rPr>
               <a:t>Surunkali yallig'lanishlar</a:t>
             </a:r>
@@ -7100,13 +7103,13 @@
       </p:sp>
       <p:sp>
         <p:nvSpPr>
-          <p:cNvPr id="217" name="t217"/>
-          <p:cNvSpPr txBox="1"/>
-          <p:nvPr/>
-        </p:nvSpPr>
-        <p:spPr>
-          <a:xfrm>
-            <a:off x="360000" y="1116000"/>
+          <p:cNvPr id="7" name="t7"/>
+          <p:cNvSpPr txBox="1"/>
+          <p:nvPr/>
+        </p:nvSpPr>
+        <p:spPr>
+          <a:xfrm>
+            <a:off x="360000" y="1133999"/>
             <a:ext cx="5328001" cy="720000"/>
           </a:xfrm>
           <a:prstGeom prst="rect">
@@ -7127,7 +7130,7 @@
                 <a:solidFill>
                   <a:srgbClr val="5E7D80"/>
                 </a:solidFill>
-                <a:latin typeface="+mj-lt"/>
+                <a:latin typeface="Calibri"/>
               </a:rPr>
               <a:t>Salpingooforit, endometrit — infiltratlarni so'rdirish.</a:t>
             </a:r>
@@ -7136,7 +7139,7 @@
       </p:sp>
       <p:sp>
         <p:nvSpPr>
-          <p:cNvPr id="218" name="r218"/>
+          <p:cNvPr id="8" name="r8"/>
           <p:cNvSpPr>
             <a:spLocks noGrp="1"/>
           </p:cNvSpPr>
@@ -7165,7 +7168,7 @@
       </p:sp>
       <p:sp>
         <p:nvSpPr>
-          <p:cNvPr id="219" name="r219"/>
+          <p:cNvPr id="9" name="r9"/>
           <p:cNvSpPr>
             <a:spLocks noGrp="1"/>
           </p:cNvSpPr>
@@ -7194,7 +7197,7 @@
       </p:sp>
       <p:sp>
         <p:nvSpPr>
-          <p:cNvPr id="220" name="t220"/>
+          <p:cNvPr id="10" name="t10"/>
           <p:cNvSpPr txBox="1"/>
           <p:nvPr/>
         </p:nvSpPr>
@@ -7221,7 +7224,7 @@
                 <a:solidFill>
                   <a:srgbClr val="06262A"/>
                 </a:solidFill>
-                <a:latin typeface="+mj-lt"/>
+                <a:latin typeface="Calibri"/>
               </a:rPr>
               <a:t>Bepushtlik</a:t>
             </a:r>
@@ -7230,13 +7233,13 @@
       </p:sp>
       <p:sp>
         <p:nvSpPr>
-          <p:cNvPr id="221" name="t221"/>
-          <p:cNvSpPr txBox="1"/>
-          <p:nvPr/>
-        </p:nvSpPr>
-        <p:spPr>
-          <a:xfrm>
-            <a:off x="6372000" y="1116000"/>
+          <p:cNvPr id="11" name="t11"/>
+          <p:cNvSpPr txBox="1"/>
+          <p:nvPr/>
+        </p:nvSpPr>
+        <p:spPr>
+          <a:xfrm>
+            <a:off x="6372000" y="1133999"/>
             <a:ext cx="5328001" cy="720000"/>
           </a:xfrm>
           <a:prstGeom prst="rect">
@@ -7257,16 +7260,16 @@
                 <a:solidFill>
                   <a:srgbClr val="5E7D80"/>
                 </a:solidFill>
-                <a:latin typeface="+mj-lt"/>
-              </a:rPr>
-              <a:t>Naysimon-peritoneal bepushtlikda bitishmalarni yumshatish, naychalarni tiklash.</a:t>
-            </a:r>
-          </a:p>
-        </p:txBody>
-      </p:sp>
-      <p:sp>
-        <p:nvSpPr>
-          <p:cNvPr id="222" name="r222"/>
+                <a:latin typeface="Calibri"/>
+              </a:rPr>
+              <a:t>Naysimon-peritoneal bepushtlikda bitishmalarni yumshatish.</a:t>
+            </a:r>
+          </a:p>
+        </p:txBody>
+      </p:sp>
+      <p:sp>
+        <p:nvSpPr>
+          <p:cNvPr id="12" name="r12"/>
           <p:cNvSpPr>
             <a:spLocks noGrp="1"/>
           </p:cNvSpPr>
@@ -7295,7 +7298,7 @@
       </p:sp>
       <p:sp>
         <p:nvSpPr>
-          <p:cNvPr id="223" name="r223"/>
+          <p:cNvPr id="13" name="r13"/>
           <p:cNvSpPr>
             <a:spLocks noGrp="1"/>
           </p:cNvSpPr>
@@ -7324,7 +7327,7 @@
       </p:sp>
       <p:sp>
         <p:nvSpPr>
-          <p:cNvPr id="224" name="t224"/>
+          <p:cNvPr id="14" name="t14"/>
           <p:cNvSpPr txBox="1"/>
           <p:nvPr/>
         </p:nvSpPr>
@@ -7351,7 +7354,7 @@
                 <a:solidFill>
                   <a:srgbClr val="06262A"/>
                 </a:solidFill>
-                <a:latin typeface="+mj-lt"/>
+                <a:latin typeface="Calibri"/>
               </a:rPr>
               <a:t>Menstrual buzilishlar</a:t>
             </a:r>
@@ -7360,13 +7363,13 @@
       </p:sp>
       <p:sp>
         <p:nvSpPr>
-          <p:cNvPr id="225" name="t225"/>
-          <p:cNvSpPr txBox="1"/>
-          <p:nvPr/>
-        </p:nvSpPr>
-        <p:spPr>
-          <a:xfrm>
-            <a:off x="360000" y="2430000"/>
+          <p:cNvPr id="15" name="t15"/>
+          <p:cNvSpPr txBox="1"/>
+          <p:nvPr/>
+        </p:nvSpPr>
+        <p:spPr>
+          <a:xfrm>
+            <a:off x="360000" y="2447999"/>
             <a:ext cx="5328001" cy="720000"/>
           </a:xfrm>
           <a:prstGeom prst="rect">
@@ -7387,7 +7390,7 @@
                 <a:solidFill>
                   <a:srgbClr val="5E7D80"/>
                 </a:solidFill>
-                <a:latin typeface="+mj-lt"/>
+                <a:latin typeface="Calibri"/>
               </a:rPr>
               <a:t>Algodismenoreya va gormonal nomutanosiblikda yordamchi vosita.</a:t>
             </a:r>
@@ -7396,7 +7399,7 @@
       </p:sp>
       <p:sp>
         <p:nvSpPr>
-          <p:cNvPr id="226" name="r226"/>
+          <p:cNvPr id="16" name="r16"/>
           <p:cNvSpPr>
             <a:spLocks noGrp="1"/>
           </p:cNvSpPr>
@@ -7425,7 +7428,7 @@
       </p:sp>
       <p:sp>
         <p:nvSpPr>
-          <p:cNvPr id="227" name="r227"/>
+          <p:cNvPr id="17" name="r17"/>
           <p:cNvSpPr>
             <a:spLocks noGrp="1"/>
           </p:cNvSpPr>
@@ -7454,7 +7457,7 @@
       </p:sp>
       <p:sp>
         <p:nvSpPr>
-          <p:cNvPr id="228" name="t228"/>
+          <p:cNvPr id="18" name="t18"/>
           <p:cNvSpPr txBox="1"/>
           <p:nvPr/>
         </p:nvSpPr>
@@ -7481,7 +7484,7 @@
                 <a:solidFill>
                   <a:srgbClr val="06262A"/>
                 </a:solidFill>
-                <a:latin typeface="+mj-lt"/>
+                <a:latin typeface="Calibri"/>
               </a:rPr>
               <a:t>Operatsiyadan keyin</a:t>
             </a:r>
@@ -7490,13 +7493,13 @@
       </p:sp>
       <p:sp>
         <p:nvSpPr>
-          <p:cNvPr id="229" name="t229"/>
-          <p:cNvSpPr txBox="1"/>
-          <p:nvPr/>
-        </p:nvSpPr>
-        <p:spPr>
-          <a:xfrm>
-            <a:off x="6372000" y="2430000"/>
+          <p:cNvPr id="19" name="t19"/>
+          <p:cNvSpPr txBox="1"/>
+          <p:nvPr/>
+        </p:nvSpPr>
+        <p:spPr>
+          <a:xfrm>
+            <a:off x="6372000" y="2447999"/>
             <a:ext cx="5328001" cy="720000"/>
           </a:xfrm>
           <a:prstGeom prst="rect">
@@ -7517,7 +7520,7 @@
                 <a:solidFill>
                   <a:srgbClr val="5E7D80"/>
                 </a:solidFill>
-                <a:latin typeface="+mj-lt"/>
+                <a:latin typeface="Calibri"/>
               </a:rPr>
               <a:t>Reabilitatsiya, chandiq va bitishmalar profilaktikasi.</a:t>
             </a:r>
@@ -7545,7 +7548,7 @@
     </p:bg>
     <p:spTree>
       <p:nvGrpSpPr>
-        <p:cNvPr id="1" name=""/>
+        <p:cNvPr id="1" name="slide"/>
         <p:cNvGrpSpPr/>
         <p:nvPr/>
       </p:nvGrpSpPr>
@@ -7559,7 +7562,7 @@
       </p:grpSpPr>
       <p:sp>
         <p:nvSpPr>
-          <p:cNvPr id="230" name="r230"/>
+          <p:cNvPr id="2" name="r2"/>
           <p:cNvSpPr>
             <a:spLocks noGrp="1"/>
           </p:cNvSpPr>
@@ -7588,7 +7591,7 @@
       </p:sp>
       <p:sp>
         <p:nvSpPr>
-          <p:cNvPr id="231" name="t231"/>
+          <p:cNvPr id="3" name="t3"/>
           <p:cNvSpPr txBox="1"/>
           <p:nvPr/>
         </p:nvSpPr>
@@ -7615,7 +7618,7 @@
                 <a:solidFill>
                   <a:srgbClr val="FFFFFF"/>
                 </a:solidFill>
-                <a:latin typeface="+mj-lt"/>
+                <a:latin typeface="Calibri"/>
               </a:rPr>
               <a:t>06 · TOS TUBI MUSHAKLARINI TIKLASH</a:t>
             </a:r>
@@ -7624,7 +7627,7 @@
       </p:sp>
       <p:sp>
         <p:nvSpPr>
-          <p:cNvPr id="232" name="r232"/>
+          <p:cNvPr id="4" name="r4"/>
           <p:cNvSpPr>
             <a:spLocks noGrp="1"/>
           </p:cNvSpPr>
@@ -7653,7 +7656,7 @@
       </p:sp>
       <p:sp>
         <p:nvSpPr>
-          <p:cNvPr id="233" name="t233"/>
+          <p:cNvPr id="5" name="t5"/>
           <p:cNvSpPr txBox="1"/>
           <p:nvPr/>
         </p:nvSpPr>
@@ -7680,7 +7683,7 @@
                 <a:solidFill>
                   <a:srgbClr val="06262A"/>
                 </a:solidFill>
-                <a:latin typeface="+mj-lt"/>
+                <a:latin typeface="Calibri"/>
               </a:rPr>
               <a:t>Tos tubi disfunksiyasi — siydik tutolmaslik, jinsiy a'zolar</a:t>
             </a:r>
@@ -7692,7 +7695,7 @@
                 <a:solidFill>
                   <a:srgbClr val="06262A"/>
                 </a:solidFill>
-                <a:latin typeface="+mj-lt"/>
+                <a:latin typeface="Calibri"/>
               </a:rPr>
               <a:t>tushishi va og'riqning asosiy sababidir. Maxsus reabilitatsiya</a:t>
             </a:r>
@@ -7704,7 +7707,7 @@
                 <a:solidFill>
                   <a:srgbClr val="06262A"/>
                 </a:solidFill>
-                <a:latin typeface="+mj-lt"/>
+                <a:latin typeface="Calibri"/>
               </a:rPr>
               <a:t>juda yuqori samaradorlikka ega.</a:t>
             </a:r>
@@ -7713,7 +7716,7 @@
       </p:sp>
       <p:sp>
         <p:nvSpPr>
-          <p:cNvPr id="234" name="r234"/>
+          <p:cNvPr id="6" name="r6"/>
           <p:cNvSpPr>
             <a:spLocks noGrp="1"/>
           </p:cNvSpPr>
@@ -7742,14 +7745,14 @@
       </p:sp>
       <p:sp>
         <p:nvSpPr>
-          <p:cNvPr id="235" name="t235"/>
+          <p:cNvPr id="7" name="t7"/>
           <p:cNvSpPr txBox="1"/>
           <p:nvPr/>
         </p:nvSpPr>
         <p:spPr>
           <a:xfrm>
             <a:off x="341999" y="1548000"/>
-            <a:ext cx="5634001" cy="270000"/>
+            <a:ext cx="5634001" cy="280800"/>
           </a:xfrm>
           <a:prstGeom prst="rect">
             <a:avLst/>
@@ -7769,7 +7772,7 @@
                 <a:solidFill>
                   <a:srgbClr val="06262A"/>
                 </a:solidFill>
-                <a:latin typeface="+mj-lt"/>
+                <a:latin typeface="Calibri"/>
               </a:rPr>
               <a:t>Kegel mashqlari — mushak tonusini mustahkamlash</a:t>
             </a:r>
@@ -7778,15 +7781,15 @@
       </p:sp>
       <p:sp>
         <p:nvSpPr>
-          <p:cNvPr id="236" name="r236"/>
-          <p:cNvSpPr>
-            <a:spLocks noGrp="1"/>
-          </p:cNvSpPr>
-          <p:nvPr/>
-        </p:nvSpPr>
-        <p:spPr>
-          <a:xfrm>
-            <a:off x="216000" y="1922400"/>
+          <p:cNvPr id="8" name="r8"/>
+          <p:cNvSpPr>
+            <a:spLocks noGrp="1"/>
+          </p:cNvSpPr>
+          <p:nvPr/>
+        </p:nvSpPr>
+        <p:spPr>
+          <a:xfrm>
+            <a:off x="216000" y="1929600"/>
             <a:ext cx="57600" cy="57600"/>
           </a:xfrm>
           <a:prstGeom prst="rect">
@@ -7807,14 +7810,14 @@
       </p:sp>
       <p:sp>
         <p:nvSpPr>
-          <p:cNvPr id="237" name="t237"/>
-          <p:cNvSpPr txBox="1"/>
-          <p:nvPr/>
-        </p:nvSpPr>
-        <p:spPr>
-          <a:xfrm>
-            <a:off x="341999" y="1843200"/>
-            <a:ext cx="5634001" cy="270000"/>
+          <p:cNvPr id="9" name="t9"/>
+          <p:cNvSpPr txBox="1"/>
+          <p:nvPr/>
+        </p:nvSpPr>
+        <p:spPr>
+          <a:xfrm>
+            <a:off x="341999" y="1850400"/>
+            <a:ext cx="5634001" cy="280800"/>
           </a:xfrm>
           <a:prstGeom prst="rect">
             <a:avLst/>
@@ -7834,7 +7837,7 @@
                 <a:solidFill>
                   <a:srgbClr val="06262A"/>
                 </a:solidFill>
-                <a:latin typeface="+mj-lt"/>
+                <a:latin typeface="Calibri"/>
               </a:rPr>
               <a:t>BFB (biologik teskari aloqa) — nazorat ostida mashq</a:t>
             </a:r>
@@ -7843,15 +7846,15 @@
       </p:sp>
       <p:sp>
         <p:nvSpPr>
-          <p:cNvPr id="238" name="r238"/>
-          <p:cNvSpPr>
-            <a:spLocks noGrp="1"/>
-          </p:cNvSpPr>
-          <p:nvPr/>
-        </p:nvSpPr>
-        <p:spPr>
-          <a:xfrm>
-            <a:off x="216000" y="2217600"/>
+          <p:cNvPr id="10" name="r10"/>
+          <p:cNvSpPr>
+            <a:spLocks noGrp="1"/>
+          </p:cNvSpPr>
+          <p:nvPr/>
+        </p:nvSpPr>
+        <p:spPr>
+          <a:xfrm>
+            <a:off x="216000" y="2232000"/>
             <a:ext cx="57600" cy="57600"/>
           </a:xfrm>
           <a:prstGeom prst="rect">
@@ -7872,14 +7875,14 @@
       </p:sp>
       <p:sp>
         <p:nvSpPr>
-          <p:cNvPr id="239" name="t239"/>
-          <p:cNvSpPr txBox="1"/>
-          <p:nvPr/>
-        </p:nvSpPr>
-        <p:spPr>
-          <a:xfrm>
-            <a:off x="341999" y="2138400"/>
-            <a:ext cx="5634001" cy="270000"/>
+          <p:cNvPr id="11" name="t11"/>
+          <p:cNvSpPr txBox="1"/>
+          <p:nvPr/>
+        </p:nvSpPr>
+        <p:spPr>
+          <a:xfrm>
+            <a:off x="341999" y="2152800"/>
+            <a:ext cx="5634001" cy="280800"/>
           </a:xfrm>
           <a:prstGeom prst="rect">
             <a:avLst/>
@@ -7899,7 +7902,7 @@
                 <a:solidFill>
                   <a:srgbClr val="06262A"/>
                 </a:solidFill>
-                <a:latin typeface="+mj-lt"/>
+                <a:latin typeface="Calibri"/>
               </a:rPr>
               <a:t>Elektromiostimulyatsiya — zaiflashgan mushaklarni faollashtirish</a:t>
             </a:r>
@@ -7908,7 +7911,7 @@
       </p:sp>
       <p:sp>
         <p:nvSpPr>
-          <p:cNvPr id="240" name="r240"/>
+          <p:cNvPr id="12" name="r12"/>
           <p:cNvSpPr>
             <a:spLocks noGrp="1"/>
           </p:cNvSpPr>
@@ -7937,7 +7940,7 @@
       </p:sp>
       <p:sp>
         <p:nvSpPr>
-          <p:cNvPr id="241" name="t241"/>
+          <p:cNvPr id="13" name="t13"/>
           <p:cNvSpPr txBox="1"/>
           <p:nvPr/>
         </p:nvSpPr>
@@ -7964,7 +7967,7 @@
                 <a:solidFill>
                   <a:srgbClr val="FFFFFF"/>
                 </a:solidFill>
-                <a:latin typeface="+mj-lt"/>
+                <a:latin typeface="Calibri"/>
               </a:rPr>
               <a:t>Ko'rsatkichlar</a:t>
             </a:r>
@@ -7973,15 +7976,15 @@
       </p:sp>
       <p:sp>
         <p:nvSpPr>
-          <p:cNvPr id="242" name="r242"/>
-          <p:cNvSpPr>
-            <a:spLocks noGrp="1"/>
-          </p:cNvSpPr>
-          <p:nvPr/>
-        </p:nvSpPr>
-        <p:spPr>
-          <a:xfrm>
-            <a:off x="6623999" y="1303200"/>
+          <p:cNvPr id="14" name="r14"/>
+          <p:cNvSpPr>
+            <a:spLocks noGrp="1"/>
+          </p:cNvSpPr>
+          <p:nvPr/>
+        </p:nvSpPr>
+        <p:spPr>
+          <a:xfrm>
+            <a:off x="6623999" y="1339200"/>
             <a:ext cx="57600" cy="57600"/>
           </a:xfrm>
           <a:prstGeom prst="rect">
@@ -8002,14 +8005,14 @@
       </p:sp>
       <p:sp>
         <p:nvSpPr>
-          <p:cNvPr id="243" name="t243"/>
-          <p:cNvSpPr txBox="1"/>
-          <p:nvPr/>
-        </p:nvSpPr>
-        <p:spPr>
-          <a:xfrm>
-            <a:off x="6749998" y="1224000"/>
-            <a:ext cx="4914001" cy="270000"/>
+          <p:cNvPr id="15" name="t15"/>
+          <p:cNvSpPr txBox="1"/>
+          <p:nvPr/>
+        </p:nvSpPr>
+        <p:spPr>
+          <a:xfrm>
+            <a:off x="6749998" y="1260000"/>
+            <a:ext cx="4914001" cy="280800"/>
           </a:xfrm>
           <a:prstGeom prst="rect">
             <a:avLst/>
@@ -8029,7 +8032,7 @@
                 <a:solidFill>
                   <a:srgbClr val="FFFFFF"/>
                 </a:solidFill>
-                <a:latin typeface="+mj-lt"/>
+                <a:latin typeface="Calibri"/>
               </a:rPr>
               <a:t>Tug'ruqdan keyingi tiklanish</a:t>
             </a:r>
@@ -8038,15 +8041,15 @@
       </p:sp>
       <p:sp>
         <p:nvSpPr>
-          <p:cNvPr id="244" name="r244"/>
-          <p:cNvSpPr>
-            <a:spLocks noGrp="1"/>
-          </p:cNvSpPr>
-          <p:nvPr/>
-        </p:nvSpPr>
-        <p:spPr>
-          <a:xfrm>
-            <a:off x="6623999" y="1598400"/>
+          <p:cNvPr id="16" name="r16"/>
+          <p:cNvSpPr>
+            <a:spLocks noGrp="1"/>
+          </p:cNvSpPr>
+          <p:nvPr/>
+        </p:nvSpPr>
+        <p:spPr>
+          <a:xfrm>
+            <a:off x="6623999" y="1641600"/>
             <a:ext cx="57600" cy="57600"/>
           </a:xfrm>
           <a:prstGeom prst="rect">
@@ -8067,14 +8070,14 @@
       </p:sp>
       <p:sp>
         <p:nvSpPr>
-          <p:cNvPr id="245" name="t245"/>
-          <p:cNvSpPr txBox="1"/>
-          <p:nvPr/>
-        </p:nvSpPr>
-        <p:spPr>
-          <a:xfrm>
-            <a:off x="6749998" y="1519200"/>
-            <a:ext cx="4914001" cy="270000"/>
+          <p:cNvPr id="17" name="t17"/>
+          <p:cNvSpPr txBox="1"/>
+          <p:nvPr/>
+        </p:nvSpPr>
+        <p:spPr>
+          <a:xfrm>
+            <a:off x="6749998" y="1562400"/>
+            <a:ext cx="4914001" cy="280800"/>
           </a:xfrm>
           <a:prstGeom prst="rect">
             <a:avLst/>
@@ -8094,7 +8097,7 @@
                 <a:solidFill>
                   <a:srgbClr val="FFFFFF"/>
                 </a:solidFill>
-                <a:latin typeface="+mj-lt"/>
+                <a:latin typeface="Calibri"/>
               </a:rPr>
               <a:t>Stress-inkontinensiya davosi</a:t>
             </a:r>
@@ -8103,15 +8106,15 @@
       </p:sp>
       <p:sp>
         <p:nvSpPr>
-          <p:cNvPr id="246" name="r246"/>
-          <p:cNvSpPr>
-            <a:spLocks noGrp="1"/>
-          </p:cNvSpPr>
-          <p:nvPr/>
-        </p:nvSpPr>
-        <p:spPr>
-          <a:xfrm>
-            <a:off x="6623999" y="1893600"/>
+          <p:cNvPr id="18" name="r18"/>
+          <p:cNvSpPr>
+            <a:spLocks noGrp="1"/>
+          </p:cNvSpPr>
+          <p:nvPr/>
+        </p:nvSpPr>
+        <p:spPr>
+          <a:xfrm>
+            <a:off x="6623999" y="1944000"/>
             <a:ext cx="57600" cy="57600"/>
           </a:xfrm>
           <a:prstGeom prst="rect">
@@ -8132,14 +8135,14 @@
       </p:sp>
       <p:sp>
         <p:nvSpPr>
-          <p:cNvPr id="247" name="t247"/>
-          <p:cNvSpPr txBox="1"/>
-          <p:nvPr/>
-        </p:nvSpPr>
-        <p:spPr>
-          <a:xfrm>
-            <a:off x="6749998" y="1814400"/>
-            <a:ext cx="4914001" cy="270000"/>
+          <p:cNvPr id="19" name="t19"/>
+          <p:cNvSpPr txBox="1"/>
+          <p:nvPr/>
+        </p:nvSpPr>
+        <p:spPr>
+          <a:xfrm>
+            <a:off x="6749998" y="1864800"/>
+            <a:ext cx="4914001" cy="280800"/>
           </a:xfrm>
           <a:prstGeom prst="rect">
             <a:avLst/>
@@ -8159,7 +8162,7 @@
                 <a:solidFill>
                   <a:srgbClr val="FFFFFF"/>
                 </a:solidFill>
-                <a:latin typeface="+mj-lt"/>
+                <a:latin typeface="Calibri"/>
               </a:rPr>
               <a:t>Jinsiy funksiyani yaxshilash</a:t>
             </a:r>
@@ -8168,7 +8171,7 @@
       </p:sp>
       <p:sp>
         <p:nvSpPr>
-          <p:cNvPr id="248" name="t248"/>
+          <p:cNvPr id="20" name="t20"/>
           <p:cNvSpPr txBox="1"/>
           <p:nvPr/>
         </p:nvSpPr>
@@ -8191,11 +8194,11 @@
           <a:p>
             <a:pPr algn="l" indent="0" marL="0"/>
             <a:r>
-              <a:rPr lang="uz-UZ" sz="1600" b="1" dirty="0" smtClean="0">
+              <a:rPr lang="uz-UZ" sz="1500" b="1" dirty="0" smtClean="0">
                 <a:solidFill>
                   <a:srgbClr val="1DE0C4"/>
                 </a:solidFill>
-                <a:latin typeface="+mj-lt"/>
+                <a:latin typeface="Calibri"/>
               </a:rPr>
               <a:t>70% — siydik tutish nazorati yaxshilanishi</a:t>
             </a:r>
@@ -8223,7 +8226,7 @@
     </p:bg>
     <p:spTree>
       <p:nvGrpSpPr>
-        <p:cNvPr id="1" name=""/>
+        <p:cNvPr id="1" name="slide"/>
         <p:cNvGrpSpPr/>
         <p:nvPr/>
       </p:nvGrpSpPr>
@@ -8237,7 +8240,7 @@
       </p:grpSpPr>
       <p:sp>
         <p:nvSpPr>
-          <p:cNvPr id="249" name="r249"/>
+          <p:cNvPr id="2" name="r2"/>
           <p:cNvSpPr>
             <a:spLocks noGrp="1"/>
           </p:cNvSpPr>
@@ -8266,7 +8269,7 @@
       </p:sp>
       <p:sp>
         <p:nvSpPr>
-          <p:cNvPr id="250" name="t250"/>
+          <p:cNvPr id="3" name="t3"/>
           <p:cNvSpPr txBox="1"/>
           <p:nvPr/>
         </p:nvSpPr>
@@ -8293,7 +8296,7 @@
                 <a:solidFill>
                   <a:srgbClr val="FFFFFF"/>
                 </a:solidFill>
-                <a:latin typeface="+mj-lt"/>
+                <a:latin typeface="Calibri"/>
               </a:rPr>
               <a:t>07 · UROLOGIK AMALIYOTDA FIZIOTERAPIYA</a:t>
             </a:r>
@@ -8302,7 +8305,7 @@
       </p:sp>
       <p:sp>
         <p:nvSpPr>
-          <p:cNvPr id="251" name="r251"/>
+          <p:cNvPr id="4" name="r4"/>
           <p:cNvSpPr>
             <a:spLocks noGrp="1"/>
           </p:cNvSpPr>
@@ -8331,7 +8334,7 @@
       </p:sp>
       <p:sp>
         <p:nvSpPr>
-          <p:cNvPr id="252" name="r252"/>
+          <p:cNvPr id="5" name="r5"/>
           <p:cNvSpPr>
             <a:spLocks noGrp="1"/>
           </p:cNvSpPr>
@@ -8360,7 +8363,7 @@
       </p:sp>
       <p:sp>
         <p:nvSpPr>
-          <p:cNvPr id="253" name="t253"/>
+          <p:cNvPr id="6" name="t6"/>
           <p:cNvSpPr txBox="1"/>
           <p:nvPr/>
         </p:nvSpPr>
@@ -8387,7 +8390,7 @@
                 <a:solidFill>
                   <a:srgbClr val="06262A"/>
                 </a:solidFill>
-                <a:latin typeface="+mj-lt"/>
+                <a:latin typeface="Calibri"/>
               </a:rPr>
               <a:t>Surunkali prostatit</a:t>
             </a:r>
@@ -8396,13 +8399,13 @@
       </p:sp>
       <p:sp>
         <p:nvSpPr>
-          <p:cNvPr id="254" name="t254"/>
-          <p:cNvSpPr txBox="1"/>
-          <p:nvPr/>
-        </p:nvSpPr>
-        <p:spPr>
-          <a:xfrm>
-            <a:off x="360000" y="1116000"/>
+          <p:cNvPr id="7" name="t7"/>
+          <p:cNvSpPr txBox="1"/>
+          <p:nvPr/>
+        </p:nvSpPr>
+        <p:spPr>
+          <a:xfrm>
+            <a:off x="360000" y="1133999"/>
             <a:ext cx="5328001" cy="720000"/>
           </a:xfrm>
           <a:prstGeom prst="rect">
@@ -8423,7 +8426,7 @@
                 <a:solidFill>
                   <a:srgbClr val="5E7D80"/>
                 </a:solidFill>
-                <a:latin typeface="+mj-lt"/>
+                <a:latin typeface="Calibri"/>
               </a:rPr>
               <a:t>Magnit-lazer va elektrostimulyatsiya — qon aylanishini yaxshilaydi.</a:t>
             </a:r>
@@ -8432,7 +8435,7 @@
       </p:sp>
       <p:sp>
         <p:nvSpPr>
-          <p:cNvPr id="255" name="r255"/>
+          <p:cNvPr id="8" name="r8"/>
           <p:cNvSpPr>
             <a:spLocks noGrp="1"/>
           </p:cNvSpPr>
@@ -8461,7 +8464,7 @@
       </p:sp>
       <p:sp>
         <p:nvSpPr>
-          <p:cNvPr id="256" name="r256"/>
+          <p:cNvPr id="9" name="r9"/>
           <p:cNvSpPr>
             <a:spLocks noGrp="1"/>
           </p:cNvSpPr>
@@ -8490,7 +8493,7 @@
       </p:sp>
       <p:sp>
         <p:nvSpPr>
-          <p:cNvPr id="257" name="t257"/>
+          <p:cNvPr id="10" name="t10"/>
           <p:cNvSpPr txBox="1"/>
           <p:nvPr/>
         </p:nvSpPr>
@@ -8517,7 +8520,7 @@
                 <a:solidFill>
                   <a:srgbClr val="06262A"/>
                 </a:solidFill>
-                <a:latin typeface="+mj-lt"/>
+                <a:latin typeface="Calibri"/>
               </a:rPr>
               <a:t>Siydik tutolmaslik</a:t>
             </a:r>
@@ -8526,13 +8529,13 @@
       </p:sp>
       <p:sp>
         <p:nvSpPr>
-          <p:cNvPr id="258" name="t258"/>
-          <p:cNvSpPr txBox="1"/>
-          <p:nvPr/>
-        </p:nvSpPr>
-        <p:spPr>
-          <a:xfrm>
-            <a:off x="6372000" y="1116000"/>
+          <p:cNvPr id="11" name="t11"/>
+          <p:cNvSpPr txBox="1"/>
+          <p:nvPr/>
+        </p:nvSpPr>
+        <p:spPr>
+          <a:xfrm>
+            <a:off x="6372000" y="1133999"/>
             <a:ext cx="5328001" cy="720000"/>
           </a:xfrm>
           <a:prstGeom prst="rect">
@@ -8553,7 +8556,7 @@
                 <a:solidFill>
                   <a:srgbClr val="5E7D80"/>
                 </a:solidFill>
-                <a:latin typeface="+mj-lt"/>
+                <a:latin typeface="Calibri"/>
               </a:rPr>
               <a:t>Tos tubi elektrostimulyatsiyasi va BFB orqali qovuq nazoratini tiklash.</a:t>
             </a:r>
@@ -8562,7 +8565,7 @@
       </p:sp>
       <p:sp>
         <p:nvSpPr>
-          <p:cNvPr id="259" name="r259"/>
+          <p:cNvPr id="12" name="r12"/>
           <p:cNvSpPr>
             <a:spLocks noGrp="1"/>
           </p:cNvSpPr>
@@ -8591,7 +8594,7 @@
       </p:sp>
       <p:sp>
         <p:nvSpPr>
-          <p:cNvPr id="260" name="r260"/>
+          <p:cNvPr id="13" name="r13"/>
           <p:cNvSpPr>
             <a:spLocks noGrp="1"/>
           </p:cNvSpPr>
@@ -8620,7 +8623,7 @@
       </p:sp>
       <p:sp>
         <p:nvSpPr>
-          <p:cNvPr id="261" name="t261"/>
+          <p:cNvPr id="14" name="t14"/>
           <p:cNvSpPr txBox="1"/>
           <p:nvPr/>
         </p:nvSpPr>
@@ -8647,7 +8650,7 @@
                 <a:solidFill>
                   <a:srgbClr val="06262A"/>
                 </a:solidFill>
-                <a:latin typeface="+mj-lt"/>
+                <a:latin typeface="Calibri"/>
               </a:rPr>
               <a:t>Siydik-tosh kasalligi</a:t>
             </a:r>
@@ -8656,13 +8659,13 @@
       </p:sp>
       <p:sp>
         <p:nvSpPr>
-          <p:cNvPr id="262" name="t262"/>
-          <p:cNvSpPr txBox="1"/>
-          <p:nvPr/>
-        </p:nvSpPr>
-        <p:spPr>
-          <a:xfrm>
-            <a:off x="360000" y="2430000"/>
+          <p:cNvPr id="15" name="t15"/>
+          <p:cNvSpPr txBox="1"/>
+          <p:nvPr/>
+        </p:nvSpPr>
+        <p:spPr>
+          <a:xfrm>
+            <a:off x="360000" y="2447999"/>
             <a:ext cx="5328001" cy="720000"/>
           </a:xfrm>
           <a:prstGeom prst="rect">
@@ -8683,7 +8686,7 @@
                 <a:solidFill>
                   <a:srgbClr val="5E7D80"/>
                 </a:solidFill>
-                <a:latin typeface="+mj-lt"/>
+                <a:latin typeface="Calibri"/>
               </a:rPr>
               <a:t>Ultratovush va vibroterapiya mayda toshlar chiqishiga ko'maklashadi.</a:t>
             </a:r>
@@ -8692,7 +8695,7 @@
       </p:sp>
       <p:sp>
         <p:nvSpPr>
-          <p:cNvPr id="263" name="r263"/>
+          <p:cNvPr id="16" name="r16"/>
           <p:cNvSpPr>
             <a:spLocks noGrp="1"/>
           </p:cNvSpPr>
@@ -8721,7 +8724,7 @@
       </p:sp>
       <p:sp>
         <p:nvSpPr>
-          <p:cNvPr id="264" name="r264"/>
+          <p:cNvPr id="17" name="r17"/>
           <p:cNvSpPr>
             <a:spLocks noGrp="1"/>
           </p:cNvSpPr>
@@ -8750,7 +8753,7 @@
       </p:sp>
       <p:sp>
         <p:nvSpPr>
-          <p:cNvPr id="265" name="t265"/>
+          <p:cNvPr id="18" name="t18"/>
           <p:cNvSpPr txBox="1"/>
           <p:nvPr/>
         </p:nvSpPr>
@@ -8777,7 +8780,7 @@
                 <a:solidFill>
                   <a:srgbClr val="06262A"/>
                 </a:solidFill>
-                <a:latin typeface="+mj-lt"/>
+                <a:latin typeface="Calibri"/>
               </a:rPr>
               <a:t>Sistit va uretrit</a:t>
             </a:r>
@@ -8786,13 +8789,13 @@
       </p:sp>
       <p:sp>
         <p:nvSpPr>
-          <p:cNvPr id="266" name="t266"/>
-          <p:cNvSpPr txBox="1"/>
-          <p:nvPr/>
-        </p:nvSpPr>
-        <p:spPr>
-          <a:xfrm>
-            <a:off x="6372000" y="2430000"/>
+          <p:cNvPr id="19" name="t19"/>
+          <p:cNvSpPr txBox="1"/>
+          <p:nvPr/>
+        </p:nvSpPr>
+        <p:spPr>
+          <a:xfrm>
+            <a:off x="6372000" y="2447999"/>
             <a:ext cx="5328001" cy="720000"/>
           </a:xfrm>
           <a:prstGeom prst="rect">
@@ -8813,7 +8816,7 @@
                 <a:solidFill>
                   <a:srgbClr val="5E7D80"/>
                 </a:solidFill>
-                <a:latin typeface="+mj-lt"/>
+                <a:latin typeface="Calibri"/>
               </a:rPr>
               <a:t>Yallig'lanishga qarshi, og'riqni kamaytiruvchi protseduralar.</a:t>
             </a:r>
@@ -8890,83 +8893,96 @@
           <a:gsLst>
             <a:gs pos="0">
               <a:schemeClr val="phClr">
-                <a:lumMod val="110000"/>
-                <a:satMod val="105000"/>
-                <a:tint val="67000"/>
+                <a:tint val="50000"/>
+                <a:satMod val="300000"/>
               </a:schemeClr>
             </a:gs>
-            <a:gs pos="50000">
+            <a:gs pos="35000">
               <a:schemeClr val="phClr">
-                <a:lumMod val="105000"/>
-                <a:satMod val="103000"/>
-                <a:tint val="73000"/>
+                <a:tint val="37000"/>
+                <a:satMod val="300000"/>
               </a:schemeClr>
             </a:gs>
             <a:gs pos="100000">
               <a:schemeClr val="phClr">
-                <a:lumMod val="105000"/>
-                <a:satMod val="109000"/>
-                <a:tint val="81000"/>
+                <a:tint val="15000"/>
+                <a:satMod val="350000"/>
               </a:schemeClr>
             </a:gs>
           </a:gsLst>
-          <a:lin ang="5400000" scaled="0"/>
+          <a:lin ang="16200000" scaled="1"/>
         </a:gradFill>
         <a:gradFill rotWithShape="1">
           <a:gsLst>
             <a:gs pos="0">
               <a:schemeClr val="phClr">
-                <a:satMod val="103000"/>
-                <a:lumMod val="102000"/>
-                <a:tint val="94000"/>
+                <a:shade val="51000"/>
+                <a:satMod val="130000"/>
+              </a:schemeClr>
+            </a:gs>
+            <a:gs pos="80000">
+              <a:schemeClr val="phClr">
+                <a:shade val="93000"/>
+                <a:satMod val="130000"/>
               </a:schemeClr>
             </a:gs>
             <a:gs pos="100000">
               <a:schemeClr val="phClr">
-                <a:lumMod val="99000"/>
-                <a:satMod val="120000"/>
-                <a:shade val="78000"/>
+                <a:shade val="94000"/>
+                <a:satMod val="135000"/>
               </a:schemeClr>
             </a:gs>
           </a:gsLst>
-          <a:lin ang="5400000" scaled="0"/>
+          <a:lin ang="16200000" scaled="0"/>
         </a:gradFill>
       </a:fillStyleLst>
       <a:lnStyleLst>
-        <a:ln w="6350" cap="flat" cmpd="sng" algn="ctr">
+        <a:ln w="9525" cap="flat" cmpd="sng" algn="ctr">
+          <a:solidFill>
+            <a:schemeClr val="phClr">
+              <a:shade val="95000"/>
+              <a:satMod val="105000"/>
+            </a:schemeClr>
+          </a:solidFill>
+          <a:prstDash val="solid"/>
+        </a:ln>
+        <a:ln w="25400" cap="flat" cmpd="sng" algn="ctr">
           <a:solidFill>
             <a:schemeClr val="phClr"/>
           </a:solidFill>
           <a:prstDash val="solid"/>
-          <a:miter lim="800000"/>
         </a:ln>
-        <a:ln w="12700" cap="flat" cmpd="sng" algn="ctr">
+        <a:ln w="38100" cap="flat" cmpd="sng" algn="ctr">
           <a:solidFill>
             <a:schemeClr val="phClr"/>
           </a:solidFill>
           <a:prstDash val="solid"/>
-          <a:miter lim="800000"/>
-        </a:ln>
-        <a:ln w="19050" cap="flat" cmpd="sng" algn="ctr">
-          <a:solidFill>
-            <a:schemeClr val="phClr"/>
-          </a:solidFill>
-          <a:prstDash val="solid"/>
-          <a:miter lim="800000"/>
         </a:ln>
       </a:lnStyleLst>
       <a:effectStyleLst>
         <a:effectStyle>
-          <a:effectLst/>
-        </a:effectStyle>
-        <a:effectStyle>
-          <a:effectLst/>
+          <a:effectLst>
+            <a:outerShdw blurRad="40000" dist="20000" dir="5400000" rotWithShape="0">
+              <a:srgbClr val="000000">
+                <a:alpha val="38000"/>
+              </a:srgbClr>
+            </a:outerShdw>
+          </a:effectLst>
         </a:effectStyle>
         <a:effectStyle>
           <a:effectLst>
-            <a:outerShdw blurRad="57150" dist="19050" dir="5400000" algn="ctr" rotWithShape="0">
+            <a:outerShdw blurRad="40000" dist="23000" dir="5400000" rotWithShape="0">
               <a:srgbClr val="000000">
-                <a:alpha val="63000"/>
+                <a:alpha val="35000"/>
+              </a:srgbClr>
+            </a:outerShdw>
+          </a:effectLst>
+        </a:effectStyle>
+        <a:effectStyle>
+          <a:effectLst>
+            <a:outerShdw blurRad="40000" dist="23000" dir="5400000" rotWithShape="0">
+              <a:srgbClr val="000000">
+                <a:alpha val="35000"/>
               </a:srgbClr>
             </a:outerShdw>
           </a:effectLst>
@@ -8976,32 +8992,50 @@
         <a:solidFill>
           <a:schemeClr val="phClr"/>
         </a:solidFill>
-        <a:solidFill>
-          <a:schemeClr val="phClr">
-            <a:tint val="95000"/>
-            <a:satMod val="170000"/>
-          </a:schemeClr>
-        </a:solidFill>
         <a:gradFill rotWithShape="1">
           <a:gsLst>
             <a:gs pos="0">
               <a:schemeClr val="phClr">
-                <a:tint val="93000"/>
-                <a:satMod val="150000"/>
-                <a:shade val="98000"/>
-                <a:lumMod val="102000"/>
+                <a:tint val="40000"/>
+                <a:satMod val="350000"/>
+              </a:schemeClr>
+            </a:gs>
+            <a:gs pos="40000">
+              <a:schemeClr val="phClr">
+                <a:tint val="45000"/>
+                <a:shade val="99000"/>
+                <a:satMod val="350000"/>
               </a:schemeClr>
             </a:gs>
             <a:gs pos="100000">
               <a:schemeClr val="phClr">
-                <a:tint val="98000"/>
-                <a:lumMod val="103000"/>
-                <a:satMod val="120000"/>
-                <a:shade val="94000"/>
+                <a:shade val="20000"/>
+                <a:satMod val="255000"/>
               </a:schemeClr>
             </a:gs>
           </a:gsLst>
-          <a:lin ang="16200000" scaled="0"/>
+          <a:path path="circle">
+            <a:fillToRect l="50000" t="-80000" r="50000" b="180000"/>
+          </a:path>
+        </a:gradFill>
+        <a:gradFill rotWithShape="1">
+          <a:gsLst>
+            <a:gs pos="0">
+              <a:schemeClr val="phClr">
+                <a:tint val="80000"/>
+                <a:satMod val="300000"/>
+              </a:schemeClr>
+            </a:gs>
+            <a:gs pos="100000">
+              <a:schemeClr val="phClr">
+                <a:shade val="30000"/>
+                <a:satMod val="200000"/>
+              </a:schemeClr>
+            </a:gs>
+          </a:gsLst>
+          <a:path path="circle">
+            <a:fillToRect l="50000" t="50000" r="50000" b="50000"/>
+          </a:path>
         </a:gradFill>
       </a:bgFillStyleLst>
     </a:fmtScheme>
